--- a/doc/Notation.pptx
+++ b/doc/Notation.pptx
@@ -9,6 +9,7 @@
     <p:sldId id="263" r:id="rId3"/>
     <p:sldId id="258" r:id="rId4"/>
     <p:sldId id="257" r:id="rId5"/>
+    <p:sldId id="264" r:id="rId6"/>
   </p:sldIdLst>
   <p:sldSz cx="12192000" cy="6858000"/>
   <p:notesSz cx="6858000" cy="9144000"/>
@@ -262,7 +263,7 @@
           <a:p>
             <a:fld id="{F464AAA2-30FF-420C-B1CC-BC8CBF197520}" type="datetimeFigureOut">
               <a:rPr lang="zh-CN" altLang="en-US" smtClean="0"/>
-              <a:t>2024/3/18</a:t>
+              <a:t>2026/8/17</a:t>
             </a:fld>
             <a:endParaRPr lang="zh-CN" altLang="en-US"/>
           </a:p>
@@ -460,7 +461,7 @@
           <a:p>
             <a:fld id="{F464AAA2-30FF-420C-B1CC-BC8CBF197520}" type="datetimeFigureOut">
               <a:rPr lang="zh-CN" altLang="en-US" smtClean="0"/>
-              <a:t>2024/3/18</a:t>
+              <a:t>2026/8/17</a:t>
             </a:fld>
             <a:endParaRPr lang="zh-CN" altLang="en-US"/>
           </a:p>
@@ -668,7 +669,7 @@
           <a:p>
             <a:fld id="{F464AAA2-30FF-420C-B1CC-BC8CBF197520}" type="datetimeFigureOut">
               <a:rPr lang="zh-CN" altLang="en-US" smtClean="0"/>
-              <a:t>2024/3/18</a:t>
+              <a:t>2026/8/17</a:t>
             </a:fld>
             <a:endParaRPr lang="zh-CN" altLang="en-US"/>
           </a:p>
@@ -866,7 +867,7 @@
           <a:p>
             <a:fld id="{F464AAA2-30FF-420C-B1CC-BC8CBF197520}" type="datetimeFigureOut">
               <a:rPr lang="zh-CN" altLang="en-US" smtClean="0"/>
-              <a:t>2024/3/18</a:t>
+              <a:t>2026/8/17</a:t>
             </a:fld>
             <a:endParaRPr lang="zh-CN" altLang="en-US"/>
           </a:p>
@@ -1141,7 +1142,7 @@
           <a:p>
             <a:fld id="{F464AAA2-30FF-420C-B1CC-BC8CBF197520}" type="datetimeFigureOut">
               <a:rPr lang="zh-CN" altLang="en-US" smtClean="0"/>
-              <a:t>2024/3/18</a:t>
+              <a:t>2026/8/17</a:t>
             </a:fld>
             <a:endParaRPr lang="zh-CN" altLang="en-US"/>
           </a:p>
@@ -1406,7 +1407,7 @@
           <a:p>
             <a:fld id="{F464AAA2-30FF-420C-B1CC-BC8CBF197520}" type="datetimeFigureOut">
               <a:rPr lang="zh-CN" altLang="en-US" smtClean="0"/>
-              <a:t>2024/3/18</a:t>
+              <a:t>2026/8/17</a:t>
             </a:fld>
             <a:endParaRPr lang="zh-CN" altLang="en-US"/>
           </a:p>
@@ -1818,7 +1819,7 @@
           <a:p>
             <a:fld id="{F464AAA2-30FF-420C-B1CC-BC8CBF197520}" type="datetimeFigureOut">
               <a:rPr lang="zh-CN" altLang="en-US" smtClean="0"/>
-              <a:t>2024/3/18</a:t>
+              <a:t>2026/8/17</a:t>
             </a:fld>
             <a:endParaRPr lang="zh-CN" altLang="en-US"/>
           </a:p>
@@ -1959,7 +1960,7 @@
           <a:p>
             <a:fld id="{F464AAA2-30FF-420C-B1CC-BC8CBF197520}" type="datetimeFigureOut">
               <a:rPr lang="zh-CN" altLang="en-US" smtClean="0"/>
-              <a:t>2024/3/18</a:t>
+              <a:t>2026/8/17</a:t>
             </a:fld>
             <a:endParaRPr lang="zh-CN" altLang="en-US"/>
           </a:p>
@@ -2072,7 +2073,7 @@
           <a:p>
             <a:fld id="{F464AAA2-30FF-420C-B1CC-BC8CBF197520}" type="datetimeFigureOut">
               <a:rPr lang="zh-CN" altLang="en-US" smtClean="0"/>
-              <a:t>2024/3/18</a:t>
+              <a:t>2026/8/17</a:t>
             </a:fld>
             <a:endParaRPr lang="zh-CN" altLang="en-US"/>
           </a:p>
@@ -2383,7 +2384,7 @@
           <a:p>
             <a:fld id="{F464AAA2-30FF-420C-B1CC-BC8CBF197520}" type="datetimeFigureOut">
               <a:rPr lang="zh-CN" altLang="en-US" smtClean="0"/>
-              <a:t>2024/3/18</a:t>
+              <a:t>2026/8/17</a:t>
             </a:fld>
             <a:endParaRPr lang="zh-CN" altLang="en-US"/>
           </a:p>
@@ -2671,7 +2672,7 @@
           <a:p>
             <a:fld id="{F464AAA2-30FF-420C-B1CC-BC8CBF197520}" type="datetimeFigureOut">
               <a:rPr lang="zh-CN" altLang="en-US" smtClean="0"/>
-              <a:t>2024/3/18</a:t>
+              <a:t>2026/8/17</a:t>
             </a:fld>
             <a:endParaRPr lang="zh-CN" altLang="en-US"/>
           </a:p>
@@ -2912,7 +2913,7 @@
           <a:p>
             <a:fld id="{F464AAA2-30FF-420C-B1CC-BC8CBF197520}" type="datetimeFigureOut">
               <a:rPr lang="zh-CN" altLang="en-US" smtClean="0"/>
-              <a:t>2024/3/18</a:t>
+              <a:t>2026/8/17</a:t>
             </a:fld>
             <a:endParaRPr lang="zh-CN" altLang="en-US"/>
           </a:p>
@@ -28603,7 +28604,7 @@
                 <a:latin typeface="Times New Roman" panose="02020603050405020304" pitchFamily="18" charset="0"/>
                 <a:cs typeface="Times New Roman" panose="02020603050405020304" pitchFamily="18" charset="0"/>
               </a:rPr>
-              <a:t>Panel Zone (1)</a:t>
+              <a:t>Panel Zone (Parallelogram)</a:t>
             </a:r>
             <a:endParaRPr lang="zh-CN" altLang="en-US" b="1" dirty="0">
               <a:latin typeface="Times New Roman" panose="02020603050405020304" pitchFamily="18" charset="0"/>
@@ -30985,7 +30986,7 @@
                 <a:latin typeface="Times New Roman" panose="02020603050405020304" pitchFamily="18" charset="0"/>
                 <a:cs typeface="Times New Roman" panose="02020603050405020304" pitchFamily="18" charset="0"/>
               </a:rPr>
-              <a:t>Panel Zone (2)</a:t>
+              <a:t>Panel Zone (Cruciform)</a:t>
             </a:r>
             <a:endParaRPr lang="zh-CN" altLang="en-US" b="1" dirty="0">
               <a:latin typeface="Times New Roman" panose="02020603050405020304" pitchFamily="18" charset="0"/>
@@ -30998,6 +30999,4806 @@
     <p:extLst>
       <p:ext uri="{BB962C8B-B14F-4D97-AF65-F5344CB8AC3E}">
         <p14:creationId xmlns:p14="http://schemas.microsoft.com/office/powerpoint/2010/main" val="4221345836"/>
+      </p:ext>
+    </p:extLst>
+  </p:cSld>
+  <p:clrMapOvr>
+    <a:masterClrMapping/>
+  </p:clrMapOvr>
+</p:sld>
+</file>
+
+<file path=ppt/slides/slide5.xml><?xml version="1.0" encoding="utf-8"?>
+<p:sld xmlns:a="http://schemas.openxmlformats.org/drawingml/2006/main" xmlns:r="http://schemas.openxmlformats.org/officeDocument/2006/relationships" xmlns:p="http://schemas.openxmlformats.org/presentationml/2006/main">
+  <p:cSld>
+    <p:spTree>
+      <p:nvGrpSpPr>
+        <p:cNvPr id="1" name=""/>
+        <p:cNvGrpSpPr/>
+        <p:nvPr/>
+      </p:nvGrpSpPr>
+      <p:grpSpPr>
+        <a:xfrm>
+          <a:off x="0" y="0"/>
+          <a:ext cx="0" cy="0"/>
+          <a:chOff x="0" y="0"/>
+          <a:chExt cx="0" cy="0"/>
+        </a:xfrm>
+      </p:grpSpPr>
+      <p:cxnSp>
+        <p:nvCxnSpPr>
+          <p:cNvPr id="4" name="直接连接符 3">
+            <a:extLst>
+              <a:ext uri="{FF2B5EF4-FFF2-40B4-BE49-F238E27FC236}">
+                <a16:creationId xmlns:a16="http://schemas.microsoft.com/office/drawing/2014/main" id="{3CD620E0-DCA2-5892-FE2B-090685E7A399}"/>
+              </a:ext>
+            </a:extLst>
+          </p:cNvPr>
+          <p:cNvCxnSpPr>
+            <a:cxnSpLocks/>
+          </p:cNvCxnSpPr>
+          <p:nvPr/>
+        </p:nvCxnSpPr>
+        <p:spPr>
+          <a:xfrm>
+            <a:off x="1674202" y="3429000"/>
+            <a:ext cx="2697407" cy="0"/>
+          </a:xfrm>
+          <a:prstGeom prst="line">
+            <a:avLst/>
+          </a:prstGeom>
+          <a:ln w="9525">
+            <a:solidFill>
+              <a:schemeClr val="bg1">
+                <a:lumMod val="75000"/>
+              </a:schemeClr>
+            </a:solidFill>
+            <a:prstDash val="dash"/>
+            <a:headEnd type="none"/>
+            <a:tailEnd type="none"/>
+          </a:ln>
+        </p:spPr>
+        <p:style>
+          <a:lnRef idx="2">
+            <a:schemeClr val="dk1"/>
+          </a:lnRef>
+          <a:fillRef idx="0">
+            <a:schemeClr val="dk1"/>
+          </a:fillRef>
+          <a:effectRef idx="1">
+            <a:schemeClr val="dk1"/>
+          </a:effectRef>
+          <a:fontRef idx="minor">
+            <a:schemeClr val="tx1"/>
+          </a:fontRef>
+        </p:style>
+      </p:cxnSp>
+      <p:cxnSp>
+        <p:nvCxnSpPr>
+          <p:cNvPr id="5" name="直接连接符 4">
+            <a:extLst>
+              <a:ext uri="{FF2B5EF4-FFF2-40B4-BE49-F238E27FC236}">
+                <a16:creationId xmlns:a16="http://schemas.microsoft.com/office/drawing/2014/main" id="{FDA0B693-A992-4AB3-18F7-E0B66EFB6AB3}"/>
+              </a:ext>
+            </a:extLst>
+          </p:cNvPr>
+          <p:cNvCxnSpPr>
+            <a:cxnSpLocks/>
+          </p:cNvCxnSpPr>
+          <p:nvPr/>
+        </p:nvCxnSpPr>
+        <p:spPr>
+          <a:xfrm>
+            <a:off x="3056625" y="2155140"/>
+            <a:ext cx="0" cy="2454960"/>
+          </a:xfrm>
+          <a:prstGeom prst="line">
+            <a:avLst/>
+          </a:prstGeom>
+          <a:ln w="9525">
+            <a:solidFill>
+              <a:schemeClr val="bg1">
+                <a:lumMod val="75000"/>
+              </a:schemeClr>
+            </a:solidFill>
+            <a:prstDash val="dash"/>
+            <a:headEnd type="none"/>
+            <a:tailEnd type="none"/>
+          </a:ln>
+        </p:spPr>
+        <p:style>
+          <a:lnRef idx="2">
+            <a:schemeClr val="dk1"/>
+          </a:lnRef>
+          <a:fillRef idx="0">
+            <a:schemeClr val="dk1"/>
+          </a:fillRef>
+          <a:effectRef idx="1">
+            <a:schemeClr val="dk1"/>
+          </a:effectRef>
+          <a:fontRef idx="minor">
+            <a:schemeClr val="tx1"/>
+          </a:fontRef>
+        </p:style>
+      </p:cxnSp>
+      <p:sp>
+        <p:nvSpPr>
+          <p:cNvPr id="6" name="spiral_319244">
+            <a:extLst>
+              <a:ext uri="{FF2B5EF4-FFF2-40B4-BE49-F238E27FC236}">
+                <a16:creationId xmlns:a16="http://schemas.microsoft.com/office/drawing/2014/main" id="{DCFC6835-D707-D07B-B96B-54F88BD07EDA}"/>
+              </a:ext>
+            </a:extLst>
+          </p:cNvPr>
+          <p:cNvSpPr>
+            <a:spLocks noChangeAspect="1"/>
+          </p:cNvSpPr>
+          <p:nvPr/>
+        </p:nvSpPr>
+        <p:spPr>
+          <a:xfrm rot="5400000">
+            <a:off x="4194534" y="1988624"/>
+            <a:ext cx="354150" cy="345379"/>
+          </a:xfrm>
+          <a:custGeom>
+            <a:avLst/>
+            <a:gdLst>
+              <a:gd name="T0" fmla="*/ 6057 w 7078"/>
+              <a:gd name="T1" fmla="*/ 1966 h 6914"/>
+              <a:gd name="T2" fmla="*/ 3017 w 7078"/>
+              <a:gd name="T3" fmla="*/ 1966 h 6914"/>
+              <a:gd name="T4" fmla="*/ 3017 w 7078"/>
+              <a:gd name="T5" fmla="*/ 4478 h 6914"/>
+              <a:gd name="T6" fmla="*/ 5107 w 7078"/>
+              <a:gd name="T7" fmla="*/ 4478 h 6914"/>
+              <a:gd name="T8" fmla="*/ 5107 w 7078"/>
+              <a:gd name="T9" fmla="*/ 2725 h 6914"/>
+              <a:gd name="T10" fmla="*/ 3625 w 7078"/>
+              <a:gd name="T11" fmla="*/ 2725 h 6914"/>
+              <a:gd name="T12" fmla="*/ 3624 w 7078"/>
+              <a:gd name="T13" fmla="*/ 3128 h 6914"/>
+              <a:gd name="T14" fmla="*/ 4027 w 7078"/>
+              <a:gd name="T15" fmla="*/ 3128 h 6914"/>
+              <a:gd name="T16" fmla="*/ 4705 w 7078"/>
+              <a:gd name="T17" fmla="*/ 3128 h 6914"/>
+              <a:gd name="T18" fmla="*/ 4705 w 7078"/>
+              <a:gd name="T19" fmla="*/ 4076 h 6914"/>
+              <a:gd name="T20" fmla="*/ 3419 w 7078"/>
+              <a:gd name="T21" fmla="*/ 4076 h 6914"/>
+              <a:gd name="T22" fmla="*/ 3419 w 7078"/>
+              <a:gd name="T23" fmla="*/ 2368 h 6914"/>
+              <a:gd name="T24" fmla="*/ 5655 w 7078"/>
+              <a:gd name="T25" fmla="*/ 2368 h 6914"/>
+              <a:gd name="T26" fmla="*/ 5655 w 7078"/>
+              <a:gd name="T27" fmla="*/ 5263 h 6914"/>
+              <a:gd name="T28" fmla="*/ 1936 w 7078"/>
+              <a:gd name="T29" fmla="*/ 5263 h 6914"/>
+              <a:gd name="T30" fmla="*/ 1936 w 7078"/>
+              <a:gd name="T31" fmla="*/ 514 h 6914"/>
+              <a:gd name="T32" fmla="*/ 1936 w 7078"/>
+              <a:gd name="T33" fmla="*/ 111 h 6914"/>
+              <a:gd name="T34" fmla="*/ 1533 w 7078"/>
+              <a:gd name="T35" fmla="*/ 111 h 6914"/>
+              <a:gd name="T36" fmla="*/ 1533 w 7078"/>
+              <a:gd name="T37" fmla="*/ 5665 h 6914"/>
+              <a:gd name="T38" fmla="*/ 6057 w 7078"/>
+              <a:gd name="T39" fmla="*/ 5665 h 6914"/>
+              <a:gd name="T40" fmla="*/ 6057 w 7078"/>
+              <a:gd name="T41" fmla="*/ 1966 h 6914"/>
+            </a:gdLst>
+            <a:ahLst/>
+            <a:cxnLst>
+              <a:cxn ang="0">
+                <a:pos x="T0" y="T1"/>
+              </a:cxn>
+              <a:cxn ang="0">
+                <a:pos x="T2" y="T3"/>
+              </a:cxn>
+              <a:cxn ang="0">
+                <a:pos x="T4" y="T5"/>
+              </a:cxn>
+              <a:cxn ang="0">
+                <a:pos x="T6" y="T7"/>
+              </a:cxn>
+              <a:cxn ang="0">
+                <a:pos x="T8" y="T9"/>
+              </a:cxn>
+              <a:cxn ang="0">
+                <a:pos x="T10" y="T11"/>
+              </a:cxn>
+              <a:cxn ang="0">
+                <a:pos x="T12" y="T13"/>
+              </a:cxn>
+              <a:cxn ang="0">
+                <a:pos x="T14" y="T15"/>
+              </a:cxn>
+              <a:cxn ang="0">
+                <a:pos x="T16" y="T17"/>
+              </a:cxn>
+              <a:cxn ang="0">
+                <a:pos x="T18" y="T19"/>
+              </a:cxn>
+              <a:cxn ang="0">
+                <a:pos x="T20" y="T21"/>
+              </a:cxn>
+              <a:cxn ang="0">
+                <a:pos x="T22" y="T23"/>
+              </a:cxn>
+              <a:cxn ang="0">
+                <a:pos x="T24" y="T25"/>
+              </a:cxn>
+              <a:cxn ang="0">
+                <a:pos x="T26" y="T27"/>
+              </a:cxn>
+              <a:cxn ang="0">
+                <a:pos x="T28" y="T29"/>
+              </a:cxn>
+              <a:cxn ang="0">
+                <a:pos x="T30" y="T31"/>
+              </a:cxn>
+              <a:cxn ang="0">
+                <a:pos x="T32" y="T33"/>
+              </a:cxn>
+              <a:cxn ang="0">
+                <a:pos x="T34" y="T35"/>
+              </a:cxn>
+              <a:cxn ang="0">
+                <a:pos x="T36" y="T37"/>
+              </a:cxn>
+              <a:cxn ang="0">
+                <a:pos x="T38" y="T39"/>
+              </a:cxn>
+              <a:cxn ang="0">
+                <a:pos x="T40" y="T41"/>
+              </a:cxn>
+            </a:cxnLst>
+            <a:rect l="0" t="0" r="r" b="b"/>
+            <a:pathLst>
+              <a:path w="7078" h="6914">
+                <a:moveTo>
+                  <a:pt x="6057" y="1966"/>
+                </a:moveTo>
+                <a:cubicBezTo>
+                  <a:pt x="5217" y="1126"/>
+                  <a:pt x="3856" y="1126"/>
+                  <a:pt x="3017" y="1966"/>
+                </a:cubicBezTo>
+                <a:cubicBezTo>
+                  <a:pt x="2323" y="2659"/>
+                  <a:pt x="2323" y="3785"/>
+                  <a:pt x="3017" y="4478"/>
+                </a:cubicBezTo>
+                <a:cubicBezTo>
+                  <a:pt x="3594" y="5055"/>
+                  <a:pt x="4530" y="5055"/>
+                  <a:pt x="5107" y="4478"/>
+                </a:cubicBezTo>
+                <a:cubicBezTo>
+                  <a:pt x="5591" y="3994"/>
+                  <a:pt x="5591" y="3209"/>
+                  <a:pt x="5107" y="2725"/>
+                </a:cubicBezTo>
+                <a:cubicBezTo>
+                  <a:pt x="4698" y="2316"/>
+                  <a:pt x="4034" y="2316"/>
+                  <a:pt x="3625" y="2725"/>
+                </a:cubicBezTo>
+                <a:cubicBezTo>
+                  <a:pt x="3514" y="2836"/>
+                  <a:pt x="3513" y="3016"/>
+                  <a:pt x="3624" y="3128"/>
+                </a:cubicBezTo>
+                <a:cubicBezTo>
+                  <a:pt x="3735" y="3239"/>
+                  <a:pt x="3916" y="3239"/>
+                  <a:pt x="4027" y="3128"/>
+                </a:cubicBezTo>
+                <a:cubicBezTo>
+                  <a:pt x="4214" y="2941"/>
+                  <a:pt x="4518" y="2941"/>
+                  <a:pt x="4705" y="3128"/>
+                </a:cubicBezTo>
+                <a:cubicBezTo>
+                  <a:pt x="4967" y="3389"/>
+                  <a:pt x="4967" y="3814"/>
+                  <a:pt x="4705" y="4076"/>
+                </a:cubicBezTo>
+                <a:cubicBezTo>
+                  <a:pt x="4350" y="4431"/>
+                  <a:pt x="3774" y="4431"/>
+                  <a:pt x="3419" y="4076"/>
+                </a:cubicBezTo>
+                <a:cubicBezTo>
+                  <a:pt x="2948" y="3604"/>
+                  <a:pt x="2948" y="2840"/>
+                  <a:pt x="3419" y="2368"/>
+                </a:cubicBezTo>
+                <a:cubicBezTo>
+                  <a:pt x="4036" y="1751"/>
+                  <a:pt x="5037" y="1751"/>
+                  <a:pt x="5655" y="2368"/>
+                </a:cubicBezTo>
+                <a:cubicBezTo>
+                  <a:pt x="6454" y="3168"/>
+                  <a:pt x="6454" y="4463"/>
+                  <a:pt x="5655" y="5263"/>
+                </a:cubicBezTo>
+                <a:cubicBezTo>
+                  <a:pt x="4628" y="6290"/>
+                  <a:pt x="2963" y="6290"/>
+                  <a:pt x="1936" y="5263"/>
+                </a:cubicBezTo>
+                <a:cubicBezTo>
+                  <a:pt x="624" y="3951"/>
+                  <a:pt x="624" y="1825"/>
+                  <a:pt x="1936" y="514"/>
+                </a:cubicBezTo>
+                <a:cubicBezTo>
+                  <a:pt x="2047" y="403"/>
+                  <a:pt x="2047" y="222"/>
+                  <a:pt x="1936" y="111"/>
+                </a:cubicBezTo>
+                <a:cubicBezTo>
+                  <a:pt x="1825" y="0"/>
+                  <a:pt x="1644" y="0"/>
+                  <a:pt x="1533" y="111"/>
+                </a:cubicBezTo>
+                <a:cubicBezTo>
+                  <a:pt x="0" y="1645"/>
+                  <a:pt x="0" y="4132"/>
+                  <a:pt x="1533" y="5665"/>
+                </a:cubicBezTo>
+                <a:cubicBezTo>
+                  <a:pt x="2782" y="6914"/>
+                  <a:pt x="4808" y="6914"/>
+                  <a:pt x="6057" y="5665"/>
+                </a:cubicBezTo>
+                <a:cubicBezTo>
+                  <a:pt x="7078" y="4644"/>
+                  <a:pt x="7078" y="2988"/>
+                  <a:pt x="6057" y="1966"/>
+                </a:cubicBezTo>
+                <a:close/>
+              </a:path>
+            </a:pathLst>
+          </a:custGeom>
+          <a:solidFill>
+            <a:srgbClr val="00B050"/>
+          </a:solidFill>
+          <a:ln>
+            <a:noFill/>
+          </a:ln>
+        </p:spPr>
+        <p:style>
+          <a:lnRef idx="2">
+            <a:schemeClr val="accent1">
+              <a:shade val="50000"/>
+            </a:schemeClr>
+          </a:lnRef>
+          <a:fillRef idx="1">
+            <a:schemeClr val="accent1"/>
+          </a:fillRef>
+          <a:effectRef idx="0">
+            <a:schemeClr val="accent1"/>
+          </a:effectRef>
+          <a:fontRef idx="minor">
+            <a:schemeClr val="lt1"/>
+          </a:fontRef>
+        </p:style>
+        <p:txBody>
+          <a:bodyPr rtlCol="0" anchor="ctr"/>
+          <a:lstStyle/>
+          <a:p>
+            <a:pPr algn="ctr"/>
+            <a:endParaRPr lang="en-US"/>
+          </a:p>
+        </p:txBody>
+      </p:sp>
+      <p:cxnSp>
+        <p:nvCxnSpPr>
+          <p:cNvPr id="7" name="直接连接符 6">
+            <a:extLst>
+              <a:ext uri="{FF2B5EF4-FFF2-40B4-BE49-F238E27FC236}">
+                <a16:creationId xmlns:a16="http://schemas.microsoft.com/office/drawing/2014/main" id="{8E82602E-B78F-3D5D-9B6B-3D76A9A1972A}"/>
+              </a:ext>
+            </a:extLst>
+          </p:cNvPr>
+          <p:cNvCxnSpPr>
+            <a:cxnSpLocks/>
+          </p:cNvCxnSpPr>
+          <p:nvPr/>
+        </p:nvCxnSpPr>
+        <p:spPr>
+          <a:xfrm>
+            <a:off x="1674202" y="4610100"/>
+            <a:ext cx="1380084" cy="0"/>
+          </a:xfrm>
+          <a:prstGeom prst="line">
+            <a:avLst/>
+          </a:prstGeom>
+          <a:ln>
+            <a:headEnd type="oval"/>
+            <a:tailEnd type="oval"/>
+          </a:ln>
+        </p:spPr>
+        <p:style>
+          <a:lnRef idx="2">
+            <a:schemeClr val="dk1"/>
+          </a:lnRef>
+          <a:fillRef idx="0">
+            <a:schemeClr val="dk1"/>
+          </a:fillRef>
+          <a:effectRef idx="1">
+            <a:schemeClr val="dk1"/>
+          </a:effectRef>
+          <a:fontRef idx="minor">
+            <a:schemeClr val="tx1"/>
+          </a:fontRef>
+        </p:style>
+      </p:cxnSp>
+      <p:cxnSp>
+        <p:nvCxnSpPr>
+          <p:cNvPr id="9" name="直接连接符 8">
+            <a:extLst>
+              <a:ext uri="{FF2B5EF4-FFF2-40B4-BE49-F238E27FC236}">
+                <a16:creationId xmlns:a16="http://schemas.microsoft.com/office/drawing/2014/main" id="{FD8031A9-B77C-8CFD-989F-49DBDFAD3030}"/>
+              </a:ext>
+            </a:extLst>
+          </p:cNvPr>
+          <p:cNvCxnSpPr>
+            <a:cxnSpLocks/>
+          </p:cNvCxnSpPr>
+          <p:nvPr/>
+        </p:nvCxnSpPr>
+        <p:spPr>
+          <a:xfrm flipV="1">
+            <a:off x="1674202" y="2166938"/>
+            <a:ext cx="0" cy="1262062"/>
+          </a:xfrm>
+          <a:prstGeom prst="line">
+            <a:avLst/>
+          </a:prstGeom>
+          <a:ln>
+            <a:headEnd type="none"/>
+            <a:tailEnd type="none"/>
+          </a:ln>
+        </p:spPr>
+        <p:style>
+          <a:lnRef idx="2">
+            <a:schemeClr val="dk1"/>
+          </a:lnRef>
+          <a:fillRef idx="0">
+            <a:schemeClr val="dk1"/>
+          </a:fillRef>
+          <a:effectRef idx="1">
+            <a:schemeClr val="dk1"/>
+          </a:effectRef>
+          <a:fontRef idx="minor">
+            <a:schemeClr val="tx1"/>
+          </a:fontRef>
+        </p:style>
+      </p:cxnSp>
+      <p:cxnSp>
+        <p:nvCxnSpPr>
+          <p:cNvPr id="11" name="直接连接符 10">
+            <a:extLst>
+              <a:ext uri="{FF2B5EF4-FFF2-40B4-BE49-F238E27FC236}">
+                <a16:creationId xmlns:a16="http://schemas.microsoft.com/office/drawing/2014/main" id="{1B852584-DB31-71D5-E446-C0E63701EC4C}"/>
+              </a:ext>
+            </a:extLst>
+          </p:cNvPr>
+          <p:cNvCxnSpPr>
+            <a:cxnSpLocks/>
+          </p:cNvCxnSpPr>
+          <p:nvPr/>
+        </p:nvCxnSpPr>
+        <p:spPr>
+          <a:xfrm>
+            <a:off x="3054286" y="2155140"/>
+            <a:ext cx="1146239" cy="0"/>
+          </a:xfrm>
+          <a:prstGeom prst="line">
+            <a:avLst/>
+          </a:prstGeom>
+          <a:ln>
+            <a:headEnd type="none"/>
+            <a:tailEnd type="none"/>
+          </a:ln>
+        </p:spPr>
+        <p:style>
+          <a:lnRef idx="2">
+            <a:schemeClr val="dk1"/>
+          </a:lnRef>
+          <a:fillRef idx="0">
+            <a:schemeClr val="dk1"/>
+          </a:fillRef>
+          <a:effectRef idx="1">
+            <a:schemeClr val="dk1"/>
+          </a:effectRef>
+          <a:fontRef idx="minor">
+            <a:schemeClr val="tx1"/>
+          </a:fontRef>
+        </p:style>
+      </p:cxnSp>
+      <p:cxnSp>
+        <p:nvCxnSpPr>
+          <p:cNvPr id="13" name="直接连接符 12">
+            <a:extLst>
+              <a:ext uri="{FF2B5EF4-FFF2-40B4-BE49-F238E27FC236}">
+                <a16:creationId xmlns:a16="http://schemas.microsoft.com/office/drawing/2014/main" id="{B87C6EA3-9730-A152-AD90-235B55C589CF}"/>
+              </a:ext>
+            </a:extLst>
+          </p:cNvPr>
+          <p:cNvCxnSpPr>
+            <a:cxnSpLocks/>
+          </p:cNvCxnSpPr>
+          <p:nvPr/>
+        </p:nvCxnSpPr>
+        <p:spPr>
+          <a:xfrm flipV="1">
+            <a:off x="4371609" y="2343150"/>
+            <a:ext cx="0" cy="1090613"/>
+          </a:xfrm>
+          <a:prstGeom prst="line">
+            <a:avLst/>
+          </a:prstGeom>
+          <a:ln>
+            <a:headEnd type="none"/>
+            <a:tailEnd type="none"/>
+          </a:ln>
+        </p:spPr>
+        <p:style>
+          <a:lnRef idx="2">
+            <a:schemeClr val="dk1"/>
+          </a:lnRef>
+          <a:fillRef idx="0">
+            <a:schemeClr val="dk1"/>
+          </a:fillRef>
+          <a:effectRef idx="1">
+            <a:schemeClr val="dk1"/>
+          </a:effectRef>
+          <a:fontRef idx="minor">
+            <a:schemeClr val="tx1"/>
+          </a:fontRef>
+        </p:style>
+      </p:cxnSp>
+      <p:cxnSp>
+        <p:nvCxnSpPr>
+          <p:cNvPr id="14" name="直接连接符 13">
+            <a:extLst>
+              <a:ext uri="{FF2B5EF4-FFF2-40B4-BE49-F238E27FC236}">
+                <a16:creationId xmlns:a16="http://schemas.microsoft.com/office/drawing/2014/main" id="{1A90D437-7490-1DE9-767C-7092CADA96DD}"/>
+              </a:ext>
+            </a:extLst>
+          </p:cNvPr>
+          <p:cNvCxnSpPr>
+            <a:cxnSpLocks/>
+          </p:cNvCxnSpPr>
+          <p:nvPr/>
+        </p:nvCxnSpPr>
+        <p:spPr>
+          <a:xfrm>
+            <a:off x="847871" y="3429000"/>
+            <a:ext cx="459619" cy="0"/>
+          </a:xfrm>
+          <a:prstGeom prst="line">
+            <a:avLst/>
+          </a:prstGeom>
+          <a:ln>
+            <a:headEnd type="none"/>
+            <a:tailEnd type="none"/>
+          </a:ln>
+        </p:spPr>
+        <p:style>
+          <a:lnRef idx="2">
+            <a:schemeClr val="dk1"/>
+          </a:lnRef>
+          <a:fillRef idx="0">
+            <a:schemeClr val="dk1"/>
+          </a:fillRef>
+          <a:effectRef idx="1">
+            <a:schemeClr val="dk1"/>
+          </a:effectRef>
+          <a:fontRef idx="minor">
+            <a:schemeClr val="tx1"/>
+          </a:fontRef>
+        </p:style>
+      </p:cxnSp>
+      <p:cxnSp>
+        <p:nvCxnSpPr>
+          <p:cNvPr id="15" name="直接连接符 14">
+            <a:extLst>
+              <a:ext uri="{FF2B5EF4-FFF2-40B4-BE49-F238E27FC236}">
+                <a16:creationId xmlns:a16="http://schemas.microsoft.com/office/drawing/2014/main" id="{F62AFC18-7CD0-A3CA-3648-8C28AC81679D}"/>
+              </a:ext>
+            </a:extLst>
+          </p:cNvPr>
+          <p:cNvCxnSpPr>
+            <a:cxnSpLocks/>
+          </p:cNvCxnSpPr>
+          <p:nvPr/>
+        </p:nvCxnSpPr>
+        <p:spPr>
+          <a:xfrm>
+            <a:off x="3059986" y="1110205"/>
+            <a:ext cx="0" cy="613820"/>
+          </a:xfrm>
+          <a:prstGeom prst="line">
+            <a:avLst/>
+          </a:prstGeom>
+          <a:ln>
+            <a:headEnd type="none"/>
+            <a:tailEnd type="none"/>
+          </a:ln>
+        </p:spPr>
+        <p:style>
+          <a:lnRef idx="2">
+            <a:schemeClr val="dk1"/>
+          </a:lnRef>
+          <a:fillRef idx="0">
+            <a:schemeClr val="dk1"/>
+          </a:fillRef>
+          <a:effectRef idx="1">
+            <a:schemeClr val="dk1"/>
+          </a:effectRef>
+          <a:fontRef idx="minor">
+            <a:schemeClr val="tx1"/>
+          </a:fontRef>
+        </p:style>
+      </p:cxnSp>
+      <p:cxnSp>
+        <p:nvCxnSpPr>
+          <p:cNvPr id="16" name="直接连接符 15">
+            <a:extLst>
+              <a:ext uri="{FF2B5EF4-FFF2-40B4-BE49-F238E27FC236}">
+                <a16:creationId xmlns:a16="http://schemas.microsoft.com/office/drawing/2014/main" id="{37D762BC-DC92-C236-6DCA-EF2867215732}"/>
+              </a:ext>
+            </a:extLst>
+          </p:cNvPr>
+          <p:cNvCxnSpPr>
+            <a:cxnSpLocks/>
+          </p:cNvCxnSpPr>
+          <p:nvPr/>
+        </p:nvCxnSpPr>
+        <p:spPr>
+          <a:xfrm flipV="1">
+            <a:off x="3049776" y="5043488"/>
+            <a:ext cx="0" cy="695706"/>
+          </a:xfrm>
+          <a:prstGeom prst="line">
+            <a:avLst/>
+          </a:prstGeom>
+          <a:ln>
+            <a:headEnd type="none"/>
+            <a:tailEnd type="none"/>
+          </a:ln>
+        </p:spPr>
+        <p:style>
+          <a:lnRef idx="2">
+            <a:schemeClr val="dk1"/>
+          </a:lnRef>
+          <a:fillRef idx="0">
+            <a:schemeClr val="dk1"/>
+          </a:fillRef>
+          <a:effectRef idx="1">
+            <a:schemeClr val="dk1"/>
+          </a:effectRef>
+          <a:fontRef idx="minor">
+            <a:schemeClr val="tx1"/>
+          </a:fontRef>
+        </p:style>
+      </p:cxnSp>
+      <p:cxnSp>
+        <p:nvCxnSpPr>
+          <p:cNvPr id="17" name="直接连接符 16">
+            <a:extLst>
+              <a:ext uri="{FF2B5EF4-FFF2-40B4-BE49-F238E27FC236}">
+                <a16:creationId xmlns:a16="http://schemas.microsoft.com/office/drawing/2014/main" id="{F5590F53-B9CE-5A16-6425-02B09790B33E}"/>
+              </a:ext>
+            </a:extLst>
+          </p:cNvPr>
+          <p:cNvCxnSpPr>
+            <a:cxnSpLocks/>
+          </p:cNvCxnSpPr>
+          <p:nvPr/>
+        </p:nvCxnSpPr>
+        <p:spPr>
+          <a:xfrm flipH="1">
+            <a:off x="4722412" y="3429000"/>
+            <a:ext cx="549641" cy="0"/>
+          </a:xfrm>
+          <a:prstGeom prst="line">
+            <a:avLst/>
+          </a:prstGeom>
+          <a:ln>
+            <a:headEnd type="none"/>
+            <a:tailEnd type="none"/>
+          </a:ln>
+        </p:spPr>
+        <p:style>
+          <a:lnRef idx="2">
+            <a:schemeClr val="dk1"/>
+          </a:lnRef>
+          <a:fillRef idx="0">
+            <a:schemeClr val="dk1"/>
+          </a:fillRef>
+          <a:effectRef idx="1">
+            <a:schemeClr val="dk1"/>
+          </a:effectRef>
+          <a:fontRef idx="minor">
+            <a:schemeClr val="tx1"/>
+          </a:fontRef>
+        </p:style>
+      </p:cxnSp>
+      <p:sp>
+        <p:nvSpPr>
+          <p:cNvPr id="18" name="spiral_319244">
+            <a:extLst>
+              <a:ext uri="{FF2B5EF4-FFF2-40B4-BE49-F238E27FC236}">
+                <a16:creationId xmlns:a16="http://schemas.microsoft.com/office/drawing/2014/main" id="{02761248-ACA5-E828-60CD-C470E8F15651}"/>
+              </a:ext>
+            </a:extLst>
+          </p:cNvPr>
+          <p:cNvSpPr>
+            <a:spLocks noChangeAspect="1"/>
+          </p:cNvSpPr>
+          <p:nvPr/>
+        </p:nvSpPr>
+        <p:spPr>
+          <a:xfrm rot="5400000">
+            <a:off x="2899682" y="1752900"/>
+            <a:ext cx="354150" cy="345379"/>
+          </a:xfrm>
+          <a:custGeom>
+            <a:avLst/>
+            <a:gdLst>
+              <a:gd name="T0" fmla="*/ 6057 w 7078"/>
+              <a:gd name="T1" fmla="*/ 1966 h 6914"/>
+              <a:gd name="T2" fmla="*/ 3017 w 7078"/>
+              <a:gd name="T3" fmla="*/ 1966 h 6914"/>
+              <a:gd name="T4" fmla="*/ 3017 w 7078"/>
+              <a:gd name="T5" fmla="*/ 4478 h 6914"/>
+              <a:gd name="T6" fmla="*/ 5107 w 7078"/>
+              <a:gd name="T7" fmla="*/ 4478 h 6914"/>
+              <a:gd name="T8" fmla="*/ 5107 w 7078"/>
+              <a:gd name="T9" fmla="*/ 2725 h 6914"/>
+              <a:gd name="T10" fmla="*/ 3625 w 7078"/>
+              <a:gd name="T11" fmla="*/ 2725 h 6914"/>
+              <a:gd name="T12" fmla="*/ 3624 w 7078"/>
+              <a:gd name="T13" fmla="*/ 3128 h 6914"/>
+              <a:gd name="T14" fmla="*/ 4027 w 7078"/>
+              <a:gd name="T15" fmla="*/ 3128 h 6914"/>
+              <a:gd name="T16" fmla="*/ 4705 w 7078"/>
+              <a:gd name="T17" fmla="*/ 3128 h 6914"/>
+              <a:gd name="T18" fmla="*/ 4705 w 7078"/>
+              <a:gd name="T19" fmla="*/ 4076 h 6914"/>
+              <a:gd name="T20" fmla="*/ 3419 w 7078"/>
+              <a:gd name="T21" fmla="*/ 4076 h 6914"/>
+              <a:gd name="T22" fmla="*/ 3419 w 7078"/>
+              <a:gd name="T23" fmla="*/ 2368 h 6914"/>
+              <a:gd name="T24" fmla="*/ 5655 w 7078"/>
+              <a:gd name="T25" fmla="*/ 2368 h 6914"/>
+              <a:gd name="T26" fmla="*/ 5655 w 7078"/>
+              <a:gd name="T27" fmla="*/ 5263 h 6914"/>
+              <a:gd name="T28" fmla="*/ 1936 w 7078"/>
+              <a:gd name="T29" fmla="*/ 5263 h 6914"/>
+              <a:gd name="T30" fmla="*/ 1936 w 7078"/>
+              <a:gd name="T31" fmla="*/ 514 h 6914"/>
+              <a:gd name="T32" fmla="*/ 1936 w 7078"/>
+              <a:gd name="T33" fmla="*/ 111 h 6914"/>
+              <a:gd name="T34" fmla="*/ 1533 w 7078"/>
+              <a:gd name="T35" fmla="*/ 111 h 6914"/>
+              <a:gd name="T36" fmla="*/ 1533 w 7078"/>
+              <a:gd name="T37" fmla="*/ 5665 h 6914"/>
+              <a:gd name="T38" fmla="*/ 6057 w 7078"/>
+              <a:gd name="T39" fmla="*/ 5665 h 6914"/>
+              <a:gd name="T40" fmla="*/ 6057 w 7078"/>
+              <a:gd name="T41" fmla="*/ 1966 h 6914"/>
+            </a:gdLst>
+            <a:ahLst/>
+            <a:cxnLst>
+              <a:cxn ang="0">
+                <a:pos x="T0" y="T1"/>
+              </a:cxn>
+              <a:cxn ang="0">
+                <a:pos x="T2" y="T3"/>
+              </a:cxn>
+              <a:cxn ang="0">
+                <a:pos x="T4" y="T5"/>
+              </a:cxn>
+              <a:cxn ang="0">
+                <a:pos x="T6" y="T7"/>
+              </a:cxn>
+              <a:cxn ang="0">
+                <a:pos x="T8" y="T9"/>
+              </a:cxn>
+              <a:cxn ang="0">
+                <a:pos x="T10" y="T11"/>
+              </a:cxn>
+              <a:cxn ang="0">
+                <a:pos x="T12" y="T13"/>
+              </a:cxn>
+              <a:cxn ang="0">
+                <a:pos x="T14" y="T15"/>
+              </a:cxn>
+              <a:cxn ang="0">
+                <a:pos x="T16" y="T17"/>
+              </a:cxn>
+              <a:cxn ang="0">
+                <a:pos x="T18" y="T19"/>
+              </a:cxn>
+              <a:cxn ang="0">
+                <a:pos x="T20" y="T21"/>
+              </a:cxn>
+              <a:cxn ang="0">
+                <a:pos x="T22" y="T23"/>
+              </a:cxn>
+              <a:cxn ang="0">
+                <a:pos x="T24" y="T25"/>
+              </a:cxn>
+              <a:cxn ang="0">
+                <a:pos x="T26" y="T27"/>
+              </a:cxn>
+              <a:cxn ang="0">
+                <a:pos x="T28" y="T29"/>
+              </a:cxn>
+              <a:cxn ang="0">
+                <a:pos x="T30" y="T31"/>
+              </a:cxn>
+              <a:cxn ang="0">
+                <a:pos x="T32" y="T33"/>
+              </a:cxn>
+              <a:cxn ang="0">
+                <a:pos x="T34" y="T35"/>
+              </a:cxn>
+              <a:cxn ang="0">
+                <a:pos x="T36" y="T37"/>
+              </a:cxn>
+              <a:cxn ang="0">
+                <a:pos x="T38" y="T39"/>
+              </a:cxn>
+              <a:cxn ang="0">
+                <a:pos x="T40" y="T41"/>
+              </a:cxn>
+            </a:cxnLst>
+            <a:rect l="0" t="0" r="r" b="b"/>
+            <a:pathLst>
+              <a:path w="7078" h="6914">
+                <a:moveTo>
+                  <a:pt x="6057" y="1966"/>
+                </a:moveTo>
+                <a:cubicBezTo>
+                  <a:pt x="5217" y="1126"/>
+                  <a:pt x="3856" y="1126"/>
+                  <a:pt x="3017" y="1966"/>
+                </a:cubicBezTo>
+                <a:cubicBezTo>
+                  <a:pt x="2323" y="2659"/>
+                  <a:pt x="2323" y="3785"/>
+                  <a:pt x="3017" y="4478"/>
+                </a:cubicBezTo>
+                <a:cubicBezTo>
+                  <a:pt x="3594" y="5055"/>
+                  <a:pt x="4530" y="5055"/>
+                  <a:pt x="5107" y="4478"/>
+                </a:cubicBezTo>
+                <a:cubicBezTo>
+                  <a:pt x="5591" y="3994"/>
+                  <a:pt x="5591" y="3209"/>
+                  <a:pt x="5107" y="2725"/>
+                </a:cubicBezTo>
+                <a:cubicBezTo>
+                  <a:pt x="4698" y="2316"/>
+                  <a:pt x="4034" y="2316"/>
+                  <a:pt x="3625" y="2725"/>
+                </a:cubicBezTo>
+                <a:cubicBezTo>
+                  <a:pt x="3514" y="2836"/>
+                  <a:pt x="3513" y="3016"/>
+                  <a:pt x="3624" y="3128"/>
+                </a:cubicBezTo>
+                <a:cubicBezTo>
+                  <a:pt x="3735" y="3239"/>
+                  <a:pt x="3916" y="3239"/>
+                  <a:pt x="4027" y="3128"/>
+                </a:cubicBezTo>
+                <a:cubicBezTo>
+                  <a:pt x="4214" y="2941"/>
+                  <a:pt x="4518" y="2941"/>
+                  <a:pt x="4705" y="3128"/>
+                </a:cubicBezTo>
+                <a:cubicBezTo>
+                  <a:pt x="4967" y="3389"/>
+                  <a:pt x="4967" y="3814"/>
+                  <a:pt x="4705" y="4076"/>
+                </a:cubicBezTo>
+                <a:cubicBezTo>
+                  <a:pt x="4350" y="4431"/>
+                  <a:pt x="3774" y="4431"/>
+                  <a:pt x="3419" y="4076"/>
+                </a:cubicBezTo>
+                <a:cubicBezTo>
+                  <a:pt x="2948" y="3604"/>
+                  <a:pt x="2948" y="2840"/>
+                  <a:pt x="3419" y="2368"/>
+                </a:cubicBezTo>
+                <a:cubicBezTo>
+                  <a:pt x="4036" y="1751"/>
+                  <a:pt x="5037" y="1751"/>
+                  <a:pt x="5655" y="2368"/>
+                </a:cubicBezTo>
+                <a:cubicBezTo>
+                  <a:pt x="6454" y="3168"/>
+                  <a:pt x="6454" y="4463"/>
+                  <a:pt x="5655" y="5263"/>
+                </a:cubicBezTo>
+                <a:cubicBezTo>
+                  <a:pt x="4628" y="6290"/>
+                  <a:pt x="2963" y="6290"/>
+                  <a:pt x="1936" y="5263"/>
+                </a:cubicBezTo>
+                <a:cubicBezTo>
+                  <a:pt x="624" y="3951"/>
+                  <a:pt x="624" y="1825"/>
+                  <a:pt x="1936" y="514"/>
+                </a:cubicBezTo>
+                <a:cubicBezTo>
+                  <a:pt x="2047" y="403"/>
+                  <a:pt x="2047" y="222"/>
+                  <a:pt x="1936" y="111"/>
+                </a:cubicBezTo>
+                <a:cubicBezTo>
+                  <a:pt x="1825" y="0"/>
+                  <a:pt x="1644" y="0"/>
+                  <a:pt x="1533" y="111"/>
+                </a:cubicBezTo>
+                <a:cubicBezTo>
+                  <a:pt x="0" y="1645"/>
+                  <a:pt x="0" y="4132"/>
+                  <a:pt x="1533" y="5665"/>
+                </a:cubicBezTo>
+                <a:cubicBezTo>
+                  <a:pt x="2782" y="6914"/>
+                  <a:pt x="4808" y="6914"/>
+                  <a:pt x="6057" y="5665"/>
+                </a:cubicBezTo>
+                <a:cubicBezTo>
+                  <a:pt x="7078" y="4644"/>
+                  <a:pt x="7078" y="2988"/>
+                  <a:pt x="6057" y="1966"/>
+                </a:cubicBezTo>
+                <a:close/>
+              </a:path>
+            </a:pathLst>
+          </a:custGeom>
+          <a:solidFill>
+            <a:srgbClr val="FF0000"/>
+          </a:solidFill>
+          <a:ln>
+            <a:noFill/>
+          </a:ln>
+        </p:spPr>
+        <p:style>
+          <a:lnRef idx="2">
+            <a:schemeClr val="accent1">
+              <a:shade val="50000"/>
+            </a:schemeClr>
+          </a:lnRef>
+          <a:fillRef idx="1">
+            <a:schemeClr val="accent1"/>
+          </a:fillRef>
+          <a:effectRef idx="0">
+            <a:schemeClr val="accent1"/>
+          </a:effectRef>
+          <a:fontRef idx="minor">
+            <a:schemeClr val="lt1"/>
+          </a:fontRef>
+        </p:style>
+        <p:txBody>
+          <a:bodyPr rtlCol="0" anchor="ctr"/>
+          <a:lstStyle/>
+          <a:p>
+            <a:pPr algn="ctr"/>
+            <a:endParaRPr lang="en-US"/>
+          </a:p>
+        </p:txBody>
+      </p:sp>
+      <p:cxnSp>
+        <p:nvCxnSpPr>
+          <p:cNvPr id="19" name="直接连接符 18">
+            <a:extLst>
+              <a:ext uri="{FF2B5EF4-FFF2-40B4-BE49-F238E27FC236}">
+                <a16:creationId xmlns:a16="http://schemas.microsoft.com/office/drawing/2014/main" id="{AAB30631-19D4-3216-0C84-C848BEE5B695}"/>
+              </a:ext>
+            </a:extLst>
+          </p:cNvPr>
+          <p:cNvCxnSpPr>
+            <a:cxnSpLocks/>
+          </p:cNvCxnSpPr>
+          <p:nvPr/>
+        </p:nvCxnSpPr>
+        <p:spPr>
+          <a:xfrm>
+            <a:off x="1671638" y="2155140"/>
+            <a:ext cx="1382648" cy="0"/>
+          </a:xfrm>
+          <a:prstGeom prst="line">
+            <a:avLst/>
+          </a:prstGeom>
+          <a:ln>
+            <a:headEnd type="oval"/>
+            <a:tailEnd type="oval"/>
+          </a:ln>
+        </p:spPr>
+        <p:style>
+          <a:lnRef idx="2">
+            <a:schemeClr val="dk1"/>
+          </a:lnRef>
+          <a:fillRef idx="0">
+            <a:schemeClr val="dk1"/>
+          </a:fillRef>
+          <a:effectRef idx="1">
+            <a:schemeClr val="dk1"/>
+          </a:effectRef>
+          <a:fontRef idx="minor">
+            <a:schemeClr val="tx1"/>
+          </a:fontRef>
+        </p:style>
+      </p:cxnSp>
+      <p:sp>
+        <p:nvSpPr>
+          <p:cNvPr id="20" name="spiral_319244">
+            <a:extLst>
+              <a:ext uri="{FF2B5EF4-FFF2-40B4-BE49-F238E27FC236}">
+                <a16:creationId xmlns:a16="http://schemas.microsoft.com/office/drawing/2014/main" id="{F10EEB7E-6CEE-5C62-9E34-64D2884B5756}"/>
+              </a:ext>
+            </a:extLst>
+          </p:cNvPr>
+          <p:cNvSpPr>
+            <a:spLocks noChangeAspect="1"/>
+          </p:cNvSpPr>
+          <p:nvPr/>
+        </p:nvSpPr>
+        <p:spPr>
+          <a:xfrm rot="5400000">
+            <a:off x="2899681" y="4677770"/>
+            <a:ext cx="354150" cy="345379"/>
+          </a:xfrm>
+          <a:custGeom>
+            <a:avLst/>
+            <a:gdLst>
+              <a:gd name="T0" fmla="*/ 6057 w 7078"/>
+              <a:gd name="T1" fmla="*/ 1966 h 6914"/>
+              <a:gd name="T2" fmla="*/ 3017 w 7078"/>
+              <a:gd name="T3" fmla="*/ 1966 h 6914"/>
+              <a:gd name="T4" fmla="*/ 3017 w 7078"/>
+              <a:gd name="T5" fmla="*/ 4478 h 6914"/>
+              <a:gd name="T6" fmla="*/ 5107 w 7078"/>
+              <a:gd name="T7" fmla="*/ 4478 h 6914"/>
+              <a:gd name="T8" fmla="*/ 5107 w 7078"/>
+              <a:gd name="T9" fmla="*/ 2725 h 6914"/>
+              <a:gd name="T10" fmla="*/ 3625 w 7078"/>
+              <a:gd name="T11" fmla="*/ 2725 h 6914"/>
+              <a:gd name="T12" fmla="*/ 3624 w 7078"/>
+              <a:gd name="T13" fmla="*/ 3128 h 6914"/>
+              <a:gd name="T14" fmla="*/ 4027 w 7078"/>
+              <a:gd name="T15" fmla="*/ 3128 h 6914"/>
+              <a:gd name="T16" fmla="*/ 4705 w 7078"/>
+              <a:gd name="T17" fmla="*/ 3128 h 6914"/>
+              <a:gd name="T18" fmla="*/ 4705 w 7078"/>
+              <a:gd name="T19" fmla="*/ 4076 h 6914"/>
+              <a:gd name="T20" fmla="*/ 3419 w 7078"/>
+              <a:gd name="T21" fmla="*/ 4076 h 6914"/>
+              <a:gd name="T22" fmla="*/ 3419 w 7078"/>
+              <a:gd name="T23" fmla="*/ 2368 h 6914"/>
+              <a:gd name="T24" fmla="*/ 5655 w 7078"/>
+              <a:gd name="T25" fmla="*/ 2368 h 6914"/>
+              <a:gd name="T26" fmla="*/ 5655 w 7078"/>
+              <a:gd name="T27" fmla="*/ 5263 h 6914"/>
+              <a:gd name="T28" fmla="*/ 1936 w 7078"/>
+              <a:gd name="T29" fmla="*/ 5263 h 6914"/>
+              <a:gd name="T30" fmla="*/ 1936 w 7078"/>
+              <a:gd name="T31" fmla="*/ 514 h 6914"/>
+              <a:gd name="T32" fmla="*/ 1936 w 7078"/>
+              <a:gd name="T33" fmla="*/ 111 h 6914"/>
+              <a:gd name="T34" fmla="*/ 1533 w 7078"/>
+              <a:gd name="T35" fmla="*/ 111 h 6914"/>
+              <a:gd name="T36" fmla="*/ 1533 w 7078"/>
+              <a:gd name="T37" fmla="*/ 5665 h 6914"/>
+              <a:gd name="T38" fmla="*/ 6057 w 7078"/>
+              <a:gd name="T39" fmla="*/ 5665 h 6914"/>
+              <a:gd name="T40" fmla="*/ 6057 w 7078"/>
+              <a:gd name="T41" fmla="*/ 1966 h 6914"/>
+            </a:gdLst>
+            <a:ahLst/>
+            <a:cxnLst>
+              <a:cxn ang="0">
+                <a:pos x="T0" y="T1"/>
+              </a:cxn>
+              <a:cxn ang="0">
+                <a:pos x="T2" y="T3"/>
+              </a:cxn>
+              <a:cxn ang="0">
+                <a:pos x="T4" y="T5"/>
+              </a:cxn>
+              <a:cxn ang="0">
+                <a:pos x="T6" y="T7"/>
+              </a:cxn>
+              <a:cxn ang="0">
+                <a:pos x="T8" y="T9"/>
+              </a:cxn>
+              <a:cxn ang="0">
+                <a:pos x="T10" y="T11"/>
+              </a:cxn>
+              <a:cxn ang="0">
+                <a:pos x="T12" y="T13"/>
+              </a:cxn>
+              <a:cxn ang="0">
+                <a:pos x="T14" y="T15"/>
+              </a:cxn>
+              <a:cxn ang="0">
+                <a:pos x="T16" y="T17"/>
+              </a:cxn>
+              <a:cxn ang="0">
+                <a:pos x="T18" y="T19"/>
+              </a:cxn>
+              <a:cxn ang="0">
+                <a:pos x="T20" y="T21"/>
+              </a:cxn>
+              <a:cxn ang="0">
+                <a:pos x="T22" y="T23"/>
+              </a:cxn>
+              <a:cxn ang="0">
+                <a:pos x="T24" y="T25"/>
+              </a:cxn>
+              <a:cxn ang="0">
+                <a:pos x="T26" y="T27"/>
+              </a:cxn>
+              <a:cxn ang="0">
+                <a:pos x="T28" y="T29"/>
+              </a:cxn>
+              <a:cxn ang="0">
+                <a:pos x="T30" y="T31"/>
+              </a:cxn>
+              <a:cxn ang="0">
+                <a:pos x="T32" y="T33"/>
+              </a:cxn>
+              <a:cxn ang="0">
+                <a:pos x="T34" y="T35"/>
+              </a:cxn>
+              <a:cxn ang="0">
+                <a:pos x="T36" y="T37"/>
+              </a:cxn>
+              <a:cxn ang="0">
+                <a:pos x="T38" y="T39"/>
+              </a:cxn>
+              <a:cxn ang="0">
+                <a:pos x="T40" y="T41"/>
+              </a:cxn>
+            </a:cxnLst>
+            <a:rect l="0" t="0" r="r" b="b"/>
+            <a:pathLst>
+              <a:path w="7078" h="6914">
+                <a:moveTo>
+                  <a:pt x="6057" y="1966"/>
+                </a:moveTo>
+                <a:cubicBezTo>
+                  <a:pt x="5217" y="1126"/>
+                  <a:pt x="3856" y="1126"/>
+                  <a:pt x="3017" y="1966"/>
+                </a:cubicBezTo>
+                <a:cubicBezTo>
+                  <a:pt x="2323" y="2659"/>
+                  <a:pt x="2323" y="3785"/>
+                  <a:pt x="3017" y="4478"/>
+                </a:cubicBezTo>
+                <a:cubicBezTo>
+                  <a:pt x="3594" y="5055"/>
+                  <a:pt x="4530" y="5055"/>
+                  <a:pt x="5107" y="4478"/>
+                </a:cubicBezTo>
+                <a:cubicBezTo>
+                  <a:pt x="5591" y="3994"/>
+                  <a:pt x="5591" y="3209"/>
+                  <a:pt x="5107" y="2725"/>
+                </a:cubicBezTo>
+                <a:cubicBezTo>
+                  <a:pt x="4698" y="2316"/>
+                  <a:pt x="4034" y="2316"/>
+                  <a:pt x="3625" y="2725"/>
+                </a:cubicBezTo>
+                <a:cubicBezTo>
+                  <a:pt x="3514" y="2836"/>
+                  <a:pt x="3513" y="3016"/>
+                  <a:pt x="3624" y="3128"/>
+                </a:cubicBezTo>
+                <a:cubicBezTo>
+                  <a:pt x="3735" y="3239"/>
+                  <a:pt x="3916" y="3239"/>
+                  <a:pt x="4027" y="3128"/>
+                </a:cubicBezTo>
+                <a:cubicBezTo>
+                  <a:pt x="4214" y="2941"/>
+                  <a:pt x="4518" y="2941"/>
+                  <a:pt x="4705" y="3128"/>
+                </a:cubicBezTo>
+                <a:cubicBezTo>
+                  <a:pt x="4967" y="3389"/>
+                  <a:pt x="4967" y="3814"/>
+                  <a:pt x="4705" y="4076"/>
+                </a:cubicBezTo>
+                <a:cubicBezTo>
+                  <a:pt x="4350" y="4431"/>
+                  <a:pt x="3774" y="4431"/>
+                  <a:pt x="3419" y="4076"/>
+                </a:cubicBezTo>
+                <a:cubicBezTo>
+                  <a:pt x="2948" y="3604"/>
+                  <a:pt x="2948" y="2840"/>
+                  <a:pt x="3419" y="2368"/>
+                </a:cubicBezTo>
+                <a:cubicBezTo>
+                  <a:pt x="4036" y="1751"/>
+                  <a:pt x="5037" y="1751"/>
+                  <a:pt x="5655" y="2368"/>
+                </a:cubicBezTo>
+                <a:cubicBezTo>
+                  <a:pt x="6454" y="3168"/>
+                  <a:pt x="6454" y="4463"/>
+                  <a:pt x="5655" y="5263"/>
+                </a:cubicBezTo>
+                <a:cubicBezTo>
+                  <a:pt x="4628" y="6290"/>
+                  <a:pt x="2963" y="6290"/>
+                  <a:pt x="1936" y="5263"/>
+                </a:cubicBezTo>
+                <a:cubicBezTo>
+                  <a:pt x="624" y="3951"/>
+                  <a:pt x="624" y="1825"/>
+                  <a:pt x="1936" y="514"/>
+                </a:cubicBezTo>
+                <a:cubicBezTo>
+                  <a:pt x="2047" y="403"/>
+                  <a:pt x="2047" y="222"/>
+                  <a:pt x="1936" y="111"/>
+                </a:cubicBezTo>
+                <a:cubicBezTo>
+                  <a:pt x="1825" y="0"/>
+                  <a:pt x="1644" y="0"/>
+                  <a:pt x="1533" y="111"/>
+                </a:cubicBezTo>
+                <a:cubicBezTo>
+                  <a:pt x="0" y="1645"/>
+                  <a:pt x="0" y="4132"/>
+                  <a:pt x="1533" y="5665"/>
+                </a:cubicBezTo>
+                <a:cubicBezTo>
+                  <a:pt x="2782" y="6914"/>
+                  <a:pt x="4808" y="6914"/>
+                  <a:pt x="6057" y="5665"/>
+                </a:cubicBezTo>
+                <a:cubicBezTo>
+                  <a:pt x="7078" y="4644"/>
+                  <a:pt x="7078" y="2988"/>
+                  <a:pt x="6057" y="1966"/>
+                </a:cubicBezTo>
+                <a:close/>
+              </a:path>
+            </a:pathLst>
+          </a:custGeom>
+          <a:solidFill>
+            <a:srgbClr val="FF0000"/>
+          </a:solidFill>
+          <a:ln>
+            <a:noFill/>
+          </a:ln>
+        </p:spPr>
+        <p:style>
+          <a:lnRef idx="2">
+            <a:schemeClr val="accent1">
+              <a:shade val="50000"/>
+            </a:schemeClr>
+          </a:lnRef>
+          <a:fillRef idx="1">
+            <a:schemeClr val="accent1"/>
+          </a:fillRef>
+          <a:effectRef idx="0">
+            <a:schemeClr val="accent1"/>
+          </a:effectRef>
+          <a:fontRef idx="minor">
+            <a:schemeClr val="lt1"/>
+          </a:fontRef>
+        </p:style>
+        <p:txBody>
+          <a:bodyPr rtlCol="0" anchor="ctr"/>
+          <a:lstStyle/>
+          <a:p>
+            <a:pPr algn="ctr"/>
+            <a:endParaRPr lang="en-US"/>
+          </a:p>
+        </p:txBody>
+      </p:sp>
+      <p:cxnSp>
+        <p:nvCxnSpPr>
+          <p:cNvPr id="21" name="直接连接符 20">
+            <a:extLst>
+              <a:ext uri="{FF2B5EF4-FFF2-40B4-BE49-F238E27FC236}">
+                <a16:creationId xmlns:a16="http://schemas.microsoft.com/office/drawing/2014/main" id="{1D7FB6DE-95EF-4607-B3BC-41F549C62CB1}"/>
+              </a:ext>
+            </a:extLst>
+          </p:cNvPr>
+          <p:cNvCxnSpPr>
+            <a:cxnSpLocks/>
+          </p:cNvCxnSpPr>
+          <p:nvPr/>
+        </p:nvCxnSpPr>
+        <p:spPr>
+          <a:xfrm>
+            <a:off x="3049776" y="4610100"/>
+            <a:ext cx="1331724" cy="0"/>
+          </a:xfrm>
+          <a:prstGeom prst="line">
+            <a:avLst/>
+          </a:prstGeom>
+          <a:ln>
+            <a:headEnd type="none"/>
+            <a:tailEnd type="none"/>
+          </a:ln>
+        </p:spPr>
+        <p:style>
+          <a:lnRef idx="2">
+            <a:schemeClr val="dk1"/>
+          </a:lnRef>
+          <a:fillRef idx="0">
+            <a:schemeClr val="dk1"/>
+          </a:fillRef>
+          <a:effectRef idx="1">
+            <a:schemeClr val="dk1"/>
+          </a:effectRef>
+          <a:fontRef idx="minor">
+            <a:schemeClr val="tx1"/>
+          </a:fontRef>
+        </p:style>
+      </p:cxnSp>
+      <p:sp>
+        <p:nvSpPr>
+          <p:cNvPr id="22" name="文本框 21">
+            <a:extLst>
+              <a:ext uri="{FF2B5EF4-FFF2-40B4-BE49-F238E27FC236}">
+                <a16:creationId xmlns:a16="http://schemas.microsoft.com/office/drawing/2014/main" id="{D184FE4C-033F-B33C-CFC2-C0A30D6E9DC1}"/>
+              </a:ext>
+            </a:extLst>
+          </p:cNvPr>
+          <p:cNvSpPr txBox="1"/>
+          <p:nvPr/>
+        </p:nvSpPr>
+        <p:spPr>
+          <a:xfrm>
+            <a:off x="2533965" y="4247304"/>
+            <a:ext cx="1085582" cy="307777"/>
+          </a:xfrm>
+          <a:prstGeom prst="rect">
+            <a:avLst/>
+          </a:prstGeom>
+          <a:noFill/>
+        </p:spPr>
+        <p:txBody>
+          <a:bodyPr wrap="square" rtlCol="0">
+            <a:spAutoFit/>
+          </a:bodyPr>
+          <a:lstStyle/>
+          <a:p>
+            <a:pPr algn="ctr"/>
+            <a:r>
+              <a:rPr lang="en-US" altLang="zh-CN" sz="1400" dirty="0">
+                <a:latin typeface="Times New Roman" panose="02020603050405020304" pitchFamily="18" charset="0"/>
+                <a:cs typeface="Times New Roman" panose="02020603050405020304" pitchFamily="18" charset="0"/>
+              </a:rPr>
+              <a:t>11</a:t>
+            </a:r>
+            <a:r>
+              <a:rPr lang="en-US" altLang="zh-CN" sz="1400" dirty="0">
+                <a:solidFill>
+                  <a:srgbClr val="FF0000"/>
+                </a:solidFill>
+                <a:latin typeface="Times New Roman" panose="02020603050405020304" pitchFamily="18" charset="0"/>
+                <a:cs typeface="Times New Roman" panose="02020603050405020304" pitchFamily="18" charset="0"/>
+              </a:rPr>
+              <a:t>FFAA</a:t>
+            </a:r>
+            <a:r>
+              <a:rPr lang="en-US" altLang="zh-CN" sz="1400" dirty="0">
+                <a:latin typeface="Times New Roman" panose="02020603050405020304" pitchFamily="18" charset="0"/>
+                <a:cs typeface="Times New Roman" panose="02020603050405020304" pitchFamily="18" charset="0"/>
+              </a:rPr>
+              <a:t>01</a:t>
+            </a:r>
+            <a:endParaRPr lang="zh-CN" altLang="en-US" sz="1400" dirty="0">
+              <a:latin typeface="Times New Roman" panose="02020603050405020304" pitchFamily="18" charset="0"/>
+              <a:cs typeface="Times New Roman" panose="02020603050405020304" pitchFamily="18" charset="0"/>
+            </a:endParaRPr>
+          </a:p>
+        </p:txBody>
+      </p:sp>
+      <p:sp>
+        <p:nvSpPr>
+          <p:cNvPr id="23" name="文本框 22">
+            <a:extLst>
+              <a:ext uri="{FF2B5EF4-FFF2-40B4-BE49-F238E27FC236}">
+                <a16:creationId xmlns:a16="http://schemas.microsoft.com/office/drawing/2014/main" id="{EF0F740D-3E57-3DCB-8D8D-16CAE23FC706}"/>
+              </a:ext>
+            </a:extLst>
+          </p:cNvPr>
+          <p:cNvSpPr txBox="1"/>
+          <p:nvPr/>
+        </p:nvSpPr>
+        <p:spPr>
+          <a:xfrm>
+            <a:off x="1663871" y="3266355"/>
+            <a:ext cx="1085582" cy="307777"/>
+          </a:xfrm>
+          <a:prstGeom prst="rect">
+            <a:avLst/>
+          </a:prstGeom>
+          <a:noFill/>
+        </p:spPr>
+        <p:txBody>
+          <a:bodyPr wrap="square" rtlCol="0">
+            <a:spAutoFit/>
+          </a:bodyPr>
+          <a:lstStyle/>
+          <a:p>
+            <a:pPr algn="ctr"/>
+            <a:r>
+              <a:rPr lang="en-US" altLang="zh-CN" sz="1400" dirty="0">
+                <a:latin typeface="Times New Roman" panose="02020603050405020304" pitchFamily="18" charset="0"/>
+                <a:cs typeface="Times New Roman" panose="02020603050405020304" pitchFamily="18" charset="0"/>
+              </a:rPr>
+              <a:t>11</a:t>
+            </a:r>
+            <a:r>
+              <a:rPr lang="en-US" altLang="zh-CN" sz="1400" dirty="0">
+                <a:solidFill>
+                  <a:srgbClr val="FF0000"/>
+                </a:solidFill>
+                <a:latin typeface="Times New Roman" panose="02020603050405020304" pitchFamily="18" charset="0"/>
+                <a:cs typeface="Times New Roman" panose="02020603050405020304" pitchFamily="18" charset="0"/>
+              </a:rPr>
+              <a:t>FFAA</a:t>
+            </a:r>
+            <a:r>
+              <a:rPr lang="en-US" altLang="zh-CN" sz="1400" dirty="0">
+                <a:latin typeface="Times New Roman" panose="02020603050405020304" pitchFamily="18" charset="0"/>
+                <a:cs typeface="Times New Roman" panose="02020603050405020304" pitchFamily="18" charset="0"/>
+              </a:rPr>
+              <a:t>02</a:t>
+            </a:r>
+            <a:endParaRPr lang="zh-CN" altLang="en-US" sz="1400" dirty="0">
+              <a:latin typeface="Times New Roman" panose="02020603050405020304" pitchFamily="18" charset="0"/>
+              <a:cs typeface="Times New Roman" panose="02020603050405020304" pitchFamily="18" charset="0"/>
+            </a:endParaRPr>
+          </a:p>
+        </p:txBody>
+      </p:sp>
+      <p:sp>
+        <p:nvSpPr>
+          <p:cNvPr id="24" name="文本框 23">
+            <a:extLst>
+              <a:ext uri="{FF2B5EF4-FFF2-40B4-BE49-F238E27FC236}">
+                <a16:creationId xmlns:a16="http://schemas.microsoft.com/office/drawing/2014/main" id="{ED70AB8A-1565-E534-7586-9D04C19E14C6}"/>
+              </a:ext>
+            </a:extLst>
+          </p:cNvPr>
+          <p:cNvSpPr txBox="1"/>
+          <p:nvPr/>
+        </p:nvSpPr>
+        <p:spPr>
+          <a:xfrm>
+            <a:off x="2541021" y="2183949"/>
+            <a:ext cx="1085582" cy="307777"/>
+          </a:xfrm>
+          <a:prstGeom prst="rect">
+            <a:avLst/>
+          </a:prstGeom>
+          <a:noFill/>
+        </p:spPr>
+        <p:txBody>
+          <a:bodyPr wrap="square" rtlCol="0">
+            <a:spAutoFit/>
+          </a:bodyPr>
+          <a:lstStyle/>
+          <a:p>
+            <a:pPr algn="ctr"/>
+            <a:r>
+              <a:rPr lang="en-US" altLang="zh-CN" sz="1400" dirty="0">
+                <a:latin typeface="Times New Roman" panose="02020603050405020304" pitchFamily="18" charset="0"/>
+                <a:cs typeface="Times New Roman" panose="02020603050405020304" pitchFamily="18" charset="0"/>
+              </a:rPr>
+              <a:t>11</a:t>
+            </a:r>
+            <a:r>
+              <a:rPr lang="en-US" altLang="zh-CN" sz="1400" dirty="0">
+                <a:solidFill>
+                  <a:srgbClr val="FF0000"/>
+                </a:solidFill>
+                <a:latin typeface="Times New Roman" panose="02020603050405020304" pitchFamily="18" charset="0"/>
+                <a:cs typeface="Times New Roman" panose="02020603050405020304" pitchFamily="18" charset="0"/>
+              </a:rPr>
+              <a:t>FFAA</a:t>
+            </a:r>
+            <a:r>
+              <a:rPr lang="en-US" altLang="zh-CN" sz="1400" dirty="0">
+                <a:latin typeface="Times New Roman" panose="02020603050405020304" pitchFamily="18" charset="0"/>
+                <a:cs typeface="Times New Roman" panose="02020603050405020304" pitchFamily="18" charset="0"/>
+              </a:rPr>
+              <a:t>03</a:t>
+            </a:r>
+            <a:endParaRPr lang="zh-CN" altLang="en-US" sz="1400" dirty="0">
+              <a:latin typeface="Times New Roman" panose="02020603050405020304" pitchFamily="18" charset="0"/>
+              <a:cs typeface="Times New Roman" panose="02020603050405020304" pitchFamily="18" charset="0"/>
+            </a:endParaRPr>
+          </a:p>
+        </p:txBody>
+      </p:sp>
+      <p:sp>
+        <p:nvSpPr>
+          <p:cNvPr id="25" name="文本框 24">
+            <a:extLst>
+              <a:ext uri="{FF2B5EF4-FFF2-40B4-BE49-F238E27FC236}">
+                <a16:creationId xmlns:a16="http://schemas.microsoft.com/office/drawing/2014/main" id="{C2148F36-2122-14A0-2982-CE2749B560AD}"/>
+              </a:ext>
+            </a:extLst>
+          </p:cNvPr>
+          <p:cNvSpPr txBox="1"/>
+          <p:nvPr/>
+        </p:nvSpPr>
+        <p:spPr>
+          <a:xfrm>
+            <a:off x="3346728" y="3270790"/>
+            <a:ext cx="1085582" cy="307777"/>
+          </a:xfrm>
+          <a:prstGeom prst="rect">
+            <a:avLst/>
+          </a:prstGeom>
+          <a:noFill/>
+        </p:spPr>
+        <p:txBody>
+          <a:bodyPr wrap="square" rtlCol="0">
+            <a:spAutoFit/>
+          </a:bodyPr>
+          <a:lstStyle/>
+          <a:p>
+            <a:pPr algn="ctr"/>
+            <a:r>
+              <a:rPr lang="en-US" altLang="zh-CN" sz="1400" dirty="0">
+                <a:latin typeface="Times New Roman" panose="02020603050405020304" pitchFamily="18" charset="0"/>
+                <a:cs typeface="Times New Roman" panose="02020603050405020304" pitchFamily="18" charset="0"/>
+              </a:rPr>
+              <a:t>11</a:t>
+            </a:r>
+            <a:r>
+              <a:rPr lang="en-US" altLang="zh-CN" sz="1400" dirty="0">
+                <a:solidFill>
+                  <a:srgbClr val="FF0000"/>
+                </a:solidFill>
+                <a:latin typeface="Times New Roman" panose="02020603050405020304" pitchFamily="18" charset="0"/>
+                <a:cs typeface="Times New Roman" panose="02020603050405020304" pitchFamily="18" charset="0"/>
+              </a:rPr>
+              <a:t>FFAA</a:t>
+            </a:r>
+            <a:r>
+              <a:rPr lang="en-US" altLang="zh-CN" sz="1400" dirty="0">
+                <a:latin typeface="Times New Roman" panose="02020603050405020304" pitchFamily="18" charset="0"/>
+                <a:cs typeface="Times New Roman" panose="02020603050405020304" pitchFamily="18" charset="0"/>
+              </a:rPr>
+              <a:t>04</a:t>
+            </a:r>
+            <a:endParaRPr lang="zh-CN" altLang="en-US" sz="1400" dirty="0">
+              <a:latin typeface="Times New Roman" panose="02020603050405020304" pitchFamily="18" charset="0"/>
+              <a:cs typeface="Times New Roman" panose="02020603050405020304" pitchFamily="18" charset="0"/>
+            </a:endParaRPr>
+          </a:p>
+        </p:txBody>
+      </p:sp>
+      <p:sp>
+        <p:nvSpPr>
+          <p:cNvPr id="64" name="文本框 63">
+            <a:extLst>
+              <a:ext uri="{FF2B5EF4-FFF2-40B4-BE49-F238E27FC236}">
+                <a16:creationId xmlns:a16="http://schemas.microsoft.com/office/drawing/2014/main" id="{5D20B56D-98DD-FC0E-EE47-077ED8244562}"/>
+              </a:ext>
+            </a:extLst>
+          </p:cNvPr>
+          <p:cNvSpPr txBox="1"/>
+          <p:nvPr/>
+        </p:nvSpPr>
+        <p:spPr>
+          <a:xfrm>
+            <a:off x="4519012" y="495914"/>
+            <a:ext cx="3153975" cy="369332"/>
+          </a:xfrm>
+          <a:prstGeom prst="rect">
+            <a:avLst/>
+          </a:prstGeom>
+          <a:noFill/>
+          <a:ln w="19050">
+            <a:solidFill>
+              <a:schemeClr val="tx1"/>
+            </a:solidFill>
+          </a:ln>
+        </p:spPr>
+        <p:txBody>
+          <a:bodyPr wrap="square" rtlCol="0">
+            <a:spAutoFit/>
+          </a:bodyPr>
+          <a:lstStyle/>
+          <a:p>
+            <a:pPr algn="ctr"/>
+            <a:r>
+              <a:rPr lang="en-US" altLang="zh-CN" b="1" dirty="0">
+                <a:latin typeface="Times New Roman" panose="02020603050405020304" pitchFamily="18" charset="0"/>
+                <a:cs typeface="Times New Roman" panose="02020603050405020304" pitchFamily="18" charset="0"/>
+              </a:rPr>
+              <a:t>Panel Zone (Joint2D)</a:t>
+            </a:r>
+            <a:endParaRPr lang="zh-CN" altLang="en-US" b="1" dirty="0">
+              <a:latin typeface="Times New Roman" panose="02020603050405020304" pitchFamily="18" charset="0"/>
+              <a:cs typeface="Times New Roman" panose="02020603050405020304" pitchFamily="18" charset="0"/>
+            </a:endParaRPr>
+          </a:p>
+        </p:txBody>
+      </p:sp>
+      <p:sp>
+        <p:nvSpPr>
+          <p:cNvPr id="10" name="椭圆 9">
+            <a:extLst>
+              <a:ext uri="{FF2B5EF4-FFF2-40B4-BE49-F238E27FC236}">
+                <a16:creationId xmlns:a16="http://schemas.microsoft.com/office/drawing/2014/main" id="{1FE597F9-1487-F5AC-996B-B3FF7738777F}"/>
+              </a:ext>
+            </a:extLst>
+          </p:cNvPr>
+          <p:cNvSpPr/>
+          <p:nvPr/>
+        </p:nvSpPr>
+        <p:spPr>
+          <a:xfrm>
+            <a:off x="1566202" y="2047140"/>
+            <a:ext cx="216000" cy="216000"/>
+          </a:xfrm>
+          <a:prstGeom prst="ellipse">
+            <a:avLst/>
+          </a:prstGeom>
+          <a:solidFill>
+            <a:schemeClr val="bg1"/>
+          </a:solidFill>
+          <a:ln>
+            <a:solidFill>
+              <a:schemeClr val="tx1"/>
+            </a:solidFill>
+          </a:ln>
+        </p:spPr>
+        <p:style>
+          <a:lnRef idx="2">
+            <a:schemeClr val="accent1">
+              <a:shade val="15000"/>
+            </a:schemeClr>
+          </a:lnRef>
+          <a:fillRef idx="1">
+            <a:schemeClr val="accent1"/>
+          </a:fillRef>
+          <a:effectRef idx="0">
+            <a:schemeClr val="accent1"/>
+          </a:effectRef>
+          <a:fontRef idx="minor">
+            <a:schemeClr val="lt1"/>
+          </a:fontRef>
+        </p:style>
+        <p:txBody>
+          <a:bodyPr rtlCol="0" anchor="ctr"/>
+          <a:lstStyle/>
+          <a:p>
+            <a:pPr algn="ctr"/>
+            <a:endParaRPr lang="zh-CN" altLang="en-US"/>
+          </a:p>
+        </p:txBody>
+      </p:sp>
+      <p:sp>
+        <p:nvSpPr>
+          <p:cNvPr id="12" name="椭圆 11">
+            <a:extLst>
+              <a:ext uri="{FF2B5EF4-FFF2-40B4-BE49-F238E27FC236}">
+                <a16:creationId xmlns:a16="http://schemas.microsoft.com/office/drawing/2014/main" id="{FAA19CCC-BE8D-C19E-AAD7-E3793B0BEDED}"/>
+              </a:ext>
+            </a:extLst>
+          </p:cNvPr>
+          <p:cNvSpPr/>
+          <p:nvPr/>
+        </p:nvSpPr>
+        <p:spPr>
+          <a:xfrm>
+            <a:off x="4263611" y="4502100"/>
+            <a:ext cx="216000" cy="216000"/>
+          </a:xfrm>
+          <a:prstGeom prst="ellipse">
+            <a:avLst/>
+          </a:prstGeom>
+          <a:solidFill>
+            <a:schemeClr val="bg1"/>
+          </a:solidFill>
+          <a:ln>
+            <a:solidFill>
+              <a:schemeClr val="tx1"/>
+            </a:solidFill>
+          </a:ln>
+        </p:spPr>
+        <p:style>
+          <a:lnRef idx="2">
+            <a:schemeClr val="accent1">
+              <a:shade val="15000"/>
+            </a:schemeClr>
+          </a:lnRef>
+          <a:fillRef idx="1">
+            <a:schemeClr val="accent1"/>
+          </a:fillRef>
+          <a:effectRef idx="0">
+            <a:schemeClr val="accent1"/>
+          </a:effectRef>
+          <a:fontRef idx="minor">
+            <a:schemeClr val="lt1"/>
+          </a:fontRef>
+        </p:style>
+        <p:txBody>
+          <a:bodyPr rtlCol="0" anchor="ctr"/>
+          <a:lstStyle/>
+          <a:p>
+            <a:pPr algn="ctr"/>
+            <a:endParaRPr lang="zh-CN" altLang="en-US"/>
+          </a:p>
+        </p:txBody>
+      </p:sp>
+      <p:sp>
+        <p:nvSpPr>
+          <p:cNvPr id="75" name="spiral_319244">
+            <a:extLst>
+              <a:ext uri="{FF2B5EF4-FFF2-40B4-BE49-F238E27FC236}">
+                <a16:creationId xmlns:a16="http://schemas.microsoft.com/office/drawing/2014/main" id="{41357A0C-E694-4253-14A7-843635A6E424}"/>
+              </a:ext>
+            </a:extLst>
+          </p:cNvPr>
+          <p:cNvSpPr>
+            <a:spLocks noChangeAspect="1"/>
+          </p:cNvSpPr>
+          <p:nvPr/>
+        </p:nvSpPr>
+        <p:spPr>
+          <a:xfrm rot="5400000">
+            <a:off x="4391699" y="3224368"/>
+            <a:ext cx="354150" cy="345379"/>
+          </a:xfrm>
+          <a:custGeom>
+            <a:avLst/>
+            <a:gdLst>
+              <a:gd name="T0" fmla="*/ 6057 w 7078"/>
+              <a:gd name="T1" fmla="*/ 1966 h 6914"/>
+              <a:gd name="T2" fmla="*/ 3017 w 7078"/>
+              <a:gd name="T3" fmla="*/ 1966 h 6914"/>
+              <a:gd name="T4" fmla="*/ 3017 w 7078"/>
+              <a:gd name="T5" fmla="*/ 4478 h 6914"/>
+              <a:gd name="T6" fmla="*/ 5107 w 7078"/>
+              <a:gd name="T7" fmla="*/ 4478 h 6914"/>
+              <a:gd name="T8" fmla="*/ 5107 w 7078"/>
+              <a:gd name="T9" fmla="*/ 2725 h 6914"/>
+              <a:gd name="T10" fmla="*/ 3625 w 7078"/>
+              <a:gd name="T11" fmla="*/ 2725 h 6914"/>
+              <a:gd name="T12" fmla="*/ 3624 w 7078"/>
+              <a:gd name="T13" fmla="*/ 3128 h 6914"/>
+              <a:gd name="T14" fmla="*/ 4027 w 7078"/>
+              <a:gd name="T15" fmla="*/ 3128 h 6914"/>
+              <a:gd name="T16" fmla="*/ 4705 w 7078"/>
+              <a:gd name="T17" fmla="*/ 3128 h 6914"/>
+              <a:gd name="T18" fmla="*/ 4705 w 7078"/>
+              <a:gd name="T19" fmla="*/ 4076 h 6914"/>
+              <a:gd name="T20" fmla="*/ 3419 w 7078"/>
+              <a:gd name="T21" fmla="*/ 4076 h 6914"/>
+              <a:gd name="T22" fmla="*/ 3419 w 7078"/>
+              <a:gd name="T23" fmla="*/ 2368 h 6914"/>
+              <a:gd name="T24" fmla="*/ 5655 w 7078"/>
+              <a:gd name="T25" fmla="*/ 2368 h 6914"/>
+              <a:gd name="T26" fmla="*/ 5655 w 7078"/>
+              <a:gd name="T27" fmla="*/ 5263 h 6914"/>
+              <a:gd name="T28" fmla="*/ 1936 w 7078"/>
+              <a:gd name="T29" fmla="*/ 5263 h 6914"/>
+              <a:gd name="T30" fmla="*/ 1936 w 7078"/>
+              <a:gd name="T31" fmla="*/ 514 h 6914"/>
+              <a:gd name="T32" fmla="*/ 1936 w 7078"/>
+              <a:gd name="T33" fmla="*/ 111 h 6914"/>
+              <a:gd name="T34" fmla="*/ 1533 w 7078"/>
+              <a:gd name="T35" fmla="*/ 111 h 6914"/>
+              <a:gd name="T36" fmla="*/ 1533 w 7078"/>
+              <a:gd name="T37" fmla="*/ 5665 h 6914"/>
+              <a:gd name="T38" fmla="*/ 6057 w 7078"/>
+              <a:gd name="T39" fmla="*/ 5665 h 6914"/>
+              <a:gd name="T40" fmla="*/ 6057 w 7078"/>
+              <a:gd name="T41" fmla="*/ 1966 h 6914"/>
+            </a:gdLst>
+            <a:ahLst/>
+            <a:cxnLst>
+              <a:cxn ang="0">
+                <a:pos x="T0" y="T1"/>
+              </a:cxn>
+              <a:cxn ang="0">
+                <a:pos x="T2" y="T3"/>
+              </a:cxn>
+              <a:cxn ang="0">
+                <a:pos x="T4" y="T5"/>
+              </a:cxn>
+              <a:cxn ang="0">
+                <a:pos x="T6" y="T7"/>
+              </a:cxn>
+              <a:cxn ang="0">
+                <a:pos x="T8" y="T9"/>
+              </a:cxn>
+              <a:cxn ang="0">
+                <a:pos x="T10" y="T11"/>
+              </a:cxn>
+              <a:cxn ang="0">
+                <a:pos x="T12" y="T13"/>
+              </a:cxn>
+              <a:cxn ang="0">
+                <a:pos x="T14" y="T15"/>
+              </a:cxn>
+              <a:cxn ang="0">
+                <a:pos x="T16" y="T17"/>
+              </a:cxn>
+              <a:cxn ang="0">
+                <a:pos x="T18" y="T19"/>
+              </a:cxn>
+              <a:cxn ang="0">
+                <a:pos x="T20" y="T21"/>
+              </a:cxn>
+              <a:cxn ang="0">
+                <a:pos x="T22" y="T23"/>
+              </a:cxn>
+              <a:cxn ang="0">
+                <a:pos x="T24" y="T25"/>
+              </a:cxn>
+              <a:cxn ang="0">
+                <a:pos x="T26" y="T27"/>
+              </a:cxn>
+              <a:cxn ang="0">
+                <a:pos x="T28" y="T29"/>
+              </a:cxn>
+              <a:cxn ang="0">
+                <a:pos x="T30" y="T31"/>
+              </a:cxn>
+              <a:cxn ang="0">
+                <a:pos x="T32" y="T33"/>
+              </a:cxn>
+              <a:cxn ang="0">
+                <a:pos x="T34" y="T35"/>
+              </a:cxn>
+              <a:cxn ang="0">
+                <a:pos x="T36" y="T37"/>
+              </a:cxn>
+              <a:cxn ang="0">
+                <a:pos x="T38" y="T39"/>
+              </a:cxn>
+              <a:cxn ang="0">
+                <a:pos x="T40" y="T41"/>
+              </a:cxn>
+            </a:cxnLst>
+            <a:rect l="0" t="0" r="r" b="b"/>
+            <a:pathLst>
+              <a:path w="7078" h="6914">
+                <a:moveTo>
+                  <a:pt x="6057" y="1966"/>
+                </a:moveTo>
+                <a:cubicBezTo>
+                  <a:pt x="5217" y="1126"/>
+                  <a:pt x="3856" y="1126"/>
+                  <a:pt x="3017" y="1966"/>
+                </a:cubicBezTo>
+                <a:cubicBezTo>
+                  <a:pt x="2323" y="2659"/>
+                  <a:pt x="2323" y="3785"/>
+                  <a:pt x="3017" y="4478"/>
+                </a:cubicBezTo>
+                <a:cubicBezTo>
+                  <a:pt x="3594" y="5055"/>
+                  <a:pt x="4530" y="5055"/>
+                  <a:pt x="5107" y="4478"/>
+                </a:cubicBezTo>
+                <a:cubicBezTo>
+                  <a:pt x="5591" y="3994"/>
+                  <a:pt x="5591" y="3209"/>
+                  <a:pt x="5107" y="2725"/>
+                </a:cubicBezTo>
+                <a:cubicBezTo>
+                  <a:pt x="4698" y="2316"/>
+                  <a:pt x="4034" y="2316"/>
+                  <a:pt x="3625" y="2725"/>
+                </a:cubicBezTo>
+                <a:cubicBezTo>
+                  <a:pt x="3514" y="2836"/>
+                  <a:pt x="3513" y="3016"/>
+                  <a:pt x="3624" y="3128"/>
+                </a:cubicBezTo>
+                <a:cubicBezTo>
+                  <a:pt x="3735" y="3239"/>
+                  <a:pt x="3916" y="3239"/>
+                  <a:pt x="4027" y="3128"/>
+                </a:cubicBezTo>
+                <a:cubicBezTo>
+                  <a:pt x="4214" y="2941"/>
+                  <a:pt x="4518" y="2941"/>
+                  <a:pt x="4705" y="3128"/>
+                </a:cubicBezTo>
+                <a:cubicBezTo>
+                  <a:pt x="4967" y="3389"/>
+                  <a:pt x="4967" y="3814"/>
+                  <a:pt x="4705" y="4076"/>
+                </a:cubicBezTo>
+                <a:cubicBezTo>
+                  <a:pt x="4350" y="4431"/>
+                  <a:pt x="3774" y="4431"/>
+                  <a:pt x="3419" y="4076"/>
+                </a:cubicBezTo>
+                <a:cubicBezTo>
+                  <a:pt x="2948" y="3604"/>
+                  <a:pt x="2948" y="2840"/>
+                  <a:pt x="3419" y="2368"/>
+                </a:cubicBezTo>
+                <a:cubicBezTo>
+                  <a:pt x="4036" y="1751"/>
+                  <a:pt x="5037" y="1751"/>
+                  <a:pt x="5655" y="2368"/>
+                </a:cubicBezTo>
+                <a:cubicBezTo>
+                  <a:pt x="6454" y="3168"/>
+                  <a:pt x="6454" y="4463"/>
+                  <a:pt x="5655" y="5263"/>
+                </a:cubicBezTo>
+                <a:cubicBezTo>
+                  <a:pt x="4628" y="6290"/>
+                  <a:pt x="2963" y="6290"/>
+                  <a:pt x="1936" y="5263"/>
+                </a:cubicBezTo>
+                <a:cubicBezTo>
+                  <a:pt x="624" y="3951"/>
+                  <a:pt x="624" y="1825"/>
+                  <a:pt x="1936" y="514"/>
+                </a:cubicBezTo>
+                <a:cubicBezTo>
+                  <a:pt x="2047" y="403"/>
+                  <a:pt x="2047" y="222"/>
+                  <a:pt x="1936" y="111"/>
+                </a:cubicBezTo>
+                <a:cubicBezTo>
+                  <a:pt x="1825" y="0"/>
+                  <a:pt x="1644" y="0"/>
+                  <a:pt x="1533" y="111"/>
+                </a:cubicBezTo>
+                <a:cubicBezTo>
+                  <a:pt x="0" y="1645"/>
+                  <a:pt x="0" y="4132"/>
+                  <a:pt x="1533" y="5665"/>
+                </a:cubicBezTo>
+                <a:cubicBezTo>
+                  <a:pt x="2782" y="6914"/>
+                  <a:pt x="4808" y="6914"/>
+                  <a:pt x="6057" y="5665"/>
+                </a:cubicBezTo>
+                <a:cubicBezTo>
+                  <a:pt x="7078" y="4644"/>
+                  <a:pt x="7078" y="2988"/>
+                  <a:pt x="6057" y="1966"/>
+                </a:cubicBezTo>
+                <a:close/>
+              </a:path>
+            </a:pathLst>
+          </a:custGeom>
+          <a:solidFill>
+            <a:srgbClr val="FF0000"/>
+          </a:solidFill>
+          <a:ln>
+            <a:noFill/>
+          </a:ln>
+        </p:spPr>
+        <p:style>
+          <a:lnRef idx="2">
+            <a:schemeClr val="accent1">
+              <a:shade val="50000"/>
+            </a:schemeClr>
+          </a:lnRef>
+          <a:fillRef idx="1">
+            <a:schemeClr val="accent1"/>
+          </a:fillRef>
+          <a:effectRef idx="0">
+            <a:schemeClr val="accent1"/>
+          </a:effectRef>
+          <a:fontRef idx="minor">
+            <a:schemeClr val="lt1"/>
+          </a:fontRef>
+        </p:style>
+        <p:txBody>
+          <a:bodyPr rtlCol="0" anchor="ctr"/>
+          <a:lstStyle/>
+          <a:p>
+            <a:pPr algn="ctr"/>
+            <a:endParaRPr lang="en-US"/>
+          </a:p>
+        </p:txBody>
+      </p:sp>
+      <p:sp>
+        <p:nvSpPr>
+          <p:cNvPr id="76" name="spiral_319244">
+            <a:extLst>
+              <a:ext uri="{FF2B5EF4-FFF2-40B4-BE49-F238E27FC236}">
+                <a16:creationId xmlns:a16="http://schemas.microsoft.com/office/drawing/2014/main" id="{319F1F89-E82D-6183-B15A-103BC00875FB}"/>
+              </a:ext>
+            </a:extLst>
+          </p:cNvPr>
+          <p:cNvSpPr>
+            <a:spLocks noChangeAspect="1"/>
+          </p:cNvSpPr>
+          <p:nvPr/>
+        </p:nvSpPr>
+        <p:spPr>
+          <a:xfrm rot="5400000">
+            <a:off x="1313891" y="3224368"/>
+            <a:ext cx="354150" cy="345379"/>
+          </a:xfrm>
+          <a:custGeom>
+            <a:avLst/>
+            <a:gdLst>
+              <a:gd name="T0" fmla="*/ 6057 w 7078"/>
+              <a:gd name="T1" fmla="*/ 1966 h 6914"/>
+              <a:gd name="T2" fmla="*/ 3017 w 7078"/>
+              <a:gd name="T3" fmla="*/ 1966 h 6914"/>
+              <a:gd name="T4" fmla="*/ 3017 w 7078"/>
+              <a:gd name="T5" fmla="*/ 4478 h 6914"/>
+              <a:gd name="T6" fmla="*/ 5107 w 7078"/>
+              <a:gd name="T7" fmla="*/ 4478 h 6914"/>
+              <a:gd name="T8" fmla="*/ 5107 w 7078"/>
+              <a:gd name="T9" fmla="*/ 2725 h 6914"/>
+              <a:gd name="T10" fmla="*/ 3625 w 7078"/>
+              <a:gd name="T11" fmla="*/ 2725 h 6914"/>
+              <a:gd name="T12" fmla="*/ 3624 w 7078"/>
+              <a:gd name="T13" fmla="*/ 3128 h 6914"/>
+              <a:gd name="T14" fmla="*/ 4027 w 7078"/>
+              <a:gd name="T15" fmla="*/ 3128 h 6914"/>
+              <a:gd name="T16" fmla="*/ 4705 w 7078"/>
+              <a:gd name="T17" fmla="*/ 3128 h 6914"/>
+              <a:gd name="T18" fmla="*/ 4705 w 7078"/>
+              <a:gd name="T19" fmla="*/ 4076 h 6914"/>
+              <a:gd name="T20" fmla="*/ 3419 w 7078"/>
+              <a:gd name="T21" fmla="*/ 4076 h 6914"/>
+              <a:gd name="T22" fmla="*/ 3419 w 7078"/>
+              <a:gd name="T23" fmla="*/ 2368 h 6914"/>
+              <a:gd name="T24" fmla="*/ 5655 w 7078"/>
+              <a:gd name="T25" fmla="*/ 2368 h 6914"/>
+              <a:gd name="T26" fmla="*/ 5655 w 7078"/>
+              <a:gd name="T27" fmla="*/ 5263 h 6914"/>
+              <a:gd name="T28" fmla="*/ 1936 w 7078"/>
+              <a:gd name="T29" fmla="*/ 5263 h 6914"/>
+              <a:gd name="T30" fmla="*/ 1936 w 7078"/>
+              <a:gd name="T31" fmla="*/ 514 h 6914"/>
+              <a:gd name="T32" fmla="*/ 1936 w 7078"/>
+              <a:gd name="T33" fmla="*/ 111 h 6914"/>
+              <a:gd name="T34" fmla="*/ 1533 w 7078"/>
+              <a:gd name="T35" fmla="*/ 111 h 6914"/>
+              <a:gd name="T36" fmla="*/ 1533 w 7078"/>
+              <a:gd name="T37" fmla="*/ 5665 h 6914"/>
+              <a:gd name="T38" fmla="*/ 6057 w 7078"/>
+              <a:gd name="T39" fmla="*/ 5665 h 6914"/>
+              <a:gd name="T40" fmla="*/ 6057 w 7078"/>
+              <a:gd name="T41" fmla="*/ 1966 h 6914"/>
+            </a:gdLst>
+            <a:ahLst/>
+            <a:cxnLst>
+              <a:cxn ang="0">
+                <a:pos x="T0" y="T1"/>
+              </a:cxn>
+              <a:cxn ang="0">
+                <a:pos x="T2" y="T3"/>
+              </a:cxn>
+              <a:cxn ang="0">
+                <a:pos x="T4" y="T5"/>
+              </a:cxn>
+              <a:cxn ang="0">
+                <a:pos x="T6" y="T7"/>
+              </a:cxn>
+              <a:cxn ang="0">
+                <a:pos x="T8" y="T9"/>
+              </a:cxn>
+              <a:cxn ang="0">
+                <a:pos x="T10" y="T11"/>
+              </a:cxn>
+              <a:cxn ang="0">
+                <a:pos x="T12" y="T13"/>
+              </a:cxn>
+              <a:cxn ang="0">
+                <a:pos x="T14" y="T15"/>
+              </a:cxn>
+              <a:cxn ang="0">
+                <a:pos x="T16" y="T17"/>
+              </a:cxn>
+              <a:cxn ang="0">
+                <a:pos x="T18" y="T19"/>
+              </a:cxn>
+              <a:cxn ang="0">
+                <a:pos x="T20" y="T21"/>
+              </a:cxn>
+              <a:cxn ang="0">
+                <a:pos x="T22" y="T23"/>
+              </a:cxn>
+              <a:cxn ang="0">
+                <a:pos x="T24" y="T25"/>
+              </a:cxn>
+              <a:cxn ang="0">
+                <a:pos x="T26" y="T27"/>
+              </a:cxn>
+              <a:cxn ang="0">
+                <a:pos x="T28" y="T29"/>
+              </a:cxn>
+              <a:cxn ang="0">
+                <a:pos x="T30" y="T31"/>
+              </a:cxn>
+              <a:cxn ang="0">
+                <a:pos x="T32" y="T33"/>
+              </a:cxn>
+              <a:cxn ang="0">
+                <a:pos x="T34" y="T35"/>
+              </a:cxn>
+              <a:cxn ang="0">
+                <a:pos x="T36" y="T37"/>
+              </a:cxn>
+              <a:cxn ang="0">
+                <a:pos x="T38" y="T39"/>
+              </a:cxn>
+              <a:cxn ang="0">
+                <a:pos x="T40" y="T41"/>
+              </a:cxn>
+            </a:cxnLst>
+            <a:rect l="0" t="0" r="r" b="b"/>
+            <a:pathLst>
+              <a:path w="7078" h="6914">
+                <a:moveTo>
+                  <a:pt x="6057" y="1966"/>
+                </a:moveTo>
+                <a:cubicBezTo>
+                  <a:pt x="5217" y="1126"/>
+                  <a:pt x="3856" y="1126"/>
+                  <a:pt x="3017" y="1966"/>
+                </a:cubicBezTo>
+                <a:cubicBezTo>
+                  <a:pt x="2323" y="2659"/>
+                  <a:pt x="2323" y="3785"/>
+                  <a:pt x="3017" y="4478"/>
+                </a:cubicBezTo>
+                <a:cubicBezTo>
+                  <a:pt x="3594" y="5055"/>
+                  <a:pt x="4530" y="5055"/>
+                  <a:pt x="5107" y="4478"/>
+                </a:cubicBezTo>
+                <a:cubicBezTo>
+                  <a:pt x="5591" y="3994"/>
+                  <a:pt x="5591" y="3209"/>
+                  <a:pt x="5107" y="2725"/>
+                </a:cubicBezTo>
+                <a:cubicBezTo>
+                  <a:pt x="4698" y="2316"/>
+                  <a:pt x="4034" y="2316"/>
+                  <a:pt x="3625" y="2725"/>
+                </a:cubicBezTo>
+                <a:cubicBezTo>
+                  <a:pt x="3514" y="2836"/>
+                  <a:pt x="3513" y="3016"/>
+                  <a:pt x="3624" y="3128"/>
+                </a:cubicBezTo>
+                <a:cubicBezTo>
+                  <a:pt x="3735" y="3239"/>
+                  <a:pt x="3916" y="3239"/>
+                  <a:pt x="4027" y="3128"/>
+                </a:cubicBezTo>
+                <a:cubicBezTo>
+                  <a:pt x="4214" y="2941"/>
+                  <a:pt x="4518" y="2941"/>
+                  <a:pt x="4705" y="3128"/>
+                </a:cubicBezTo>
+                <a:cubicBezTo>
+                  <a:pt x="4967" y="3389"/>
+                  <a:pt x="4967" y="3814"/>
+                  <a:pt x="4705" y="4076"/>
+                </a:cubicBezTo>
+                <a:cubicBezTo>
+                  <a:pt x="4350" y="4431"/>
+                  <a:pt x="3774" y="4431"/>
+                  <a:pt x="3419" y="4076"/>
+                </a:cubicBezTo>
+                <a:cubicBezTo>
+                  <a:pt x="2948" y="3604"/>
+                  <a:pt x="2948" y="2840"/>
+                  <a:pt x="3419" y="2368"/>
+                </a:cubicBezTo>
+                <a:cubicBezTo>
+                  <a:pt x="4036" y="1751"/>
+                  <a:pt x="5037" y="1751"/>
+                  <a:pt x="5655" y="2368"/>
+                </a:cubicBezTo>
+                <a:cubicBezTo>
+                  <a:pt x="6454" y="3168"/>
+                  <a:pt x="6454" y="4463"/>
+                  <a:pt x="5655" y="5263"/>
+                </a:cubicBezTo>
+                <a:cubicBezTo>
+                  <a:pt x="4628" y="6290"/>
+                  <a:pt x="2963" y="6290"/>
+                  <a:pt x="1936" y="5263"/>
+                </a:cubicBezTo>
+                <a:cubicBezTo>
+                  <a:pt x="624" y="3951"/>
+                  <a:pt x="624" y="1825"/>
+                  <a:pt x="1936" y="514"/>
+                </a:cubicBezTo>
+                <a:cubicBezTo>
+                  <a:pt x="2047" y="403"/>
+                  <a:pt x="2047" y="222"/>
+                  <a:pt x="1936" y="111"/>
+                </a:cubicBezTo>
+                <a:cubicBezTo>
+                  <a:pt x="1825" y="0"/>
+                  <a:pt x="1644" y="0"/>
+                  <a:pt x="1533" y="111"/>
+                </a:cubicBezTo>
+                <a:cubicBezTo>
+                  <a:pt x="0" y="1645"/>
+                  <a:pt x="0" y="4132"/>
+                  <a:pt x="1533" y="5665"/>
+                </a:cubicBezTo>
+                <a:cubicBezTo>
+                  <a:pt x="2782" y="6914"/>
+                  <a:pt x="4808" y="6914"/>
+                  <a:pt x="6057" y="5665"/>
+                </a:cubicBezTo>
+                <a:cubicBezTo>
+                  <a:pt x="7078" y="4644"/>
+                  <a:pt x="7078" y="2988"/>
+                  <a:pt x="6057" y="1966"/>
+                </a:cubicBezTo>
+                <a:close/>
+              </a:path>
+            </a:pathLst>
+          </a:custGeom>
+          <a:solidFill>
+            <a:srgbClr val="FF0000"/>
+          </a:solidFill>
+          <a:ln>
+            <a:noFill/>
+          </a:ln>
+        </p:spPr>
+        <p:style>
+          <a:lnRef idx="2">
+            <a:schemeClr val="accent1">
+              <a:shade val="50000"/>
+            </a:schemeClr>
+          </a:lnRef>
+          <a:fillRef idx="1">
+            <a:schemeClr val="accent1"/>
+          </a:fillRef>
+          <a:effectRef idx="0">
+            <a:schemeClr val="accent1"/>
+          </a:effectRef>
+          <a:fontRef idx="minor">
+            <a:schemeClr val="lt1"/>
+          </a:fontRef>
+        </p:style>
+        <p:txBody>
+          <a:bodyPr rtlCol="0" anchor="ctr"/>
+          <a:lstStyle/>
+          <a:p>
+            <a:pPr algn="ctr"/>
+            <a:endParaRPr lang="en-US"/>
+          </a:p>
+        </p:txBody>
+      </p:sp>
+      <p:cxnSp>
+        <p:nvCxnSpPr>
+          <p:cNvPr id="78" name="直接连接符 77">
+            <a:extLst>
+              <a:ext uri="{FF2B5EF4-FFF2-40B4-BE49-F238E27FC236}">
+                <a16:creationId xmlns:a16="http://schemas.microsoft.com/office/drawing/2014/main" id="{9A23A693-0558-E55A-0ED4-E137C00D5D1B}"/>
+              </a:ext>
+            </a:extLst>
+          </p:cNvPr>
+          <p:cNvCxnSpPr>
+            <a:cxnSpLocks/>
+          </p:cNvCxnSpPr>
+          <p:nvPr/>
+        </p:nvCxnSpPr>
+        <p:spPr>
+          <a:xfrm flipV="1">
+            <a:off x="1674202" y="3422929"/>
+            <a:ext cx="0" cy="1182409"/>
+          </a:xfrm>
+          <a:prstGeom prst="line">
+            <a:avLst/>
+          </a:prstGeom>
+          <a:ln>
+            <a:headEnd type="none"/>
+            <a:tailEnd type="oval"/>
+          </a:ln>
+        </p:spPr>
+        <p:style>
+          <a:lnRef idx="2">
+            <a:schemeClr val="dk1"/>
+          </a:lnRef>
+          <a:fillRef idx="0">
+            <a:schemeClr val="dk1"/>
+          </a:fillRef>
+          <a:effectRef idx="1">
+            <a:schemeClr val="dk1"/>
+          </a:effectRef>
+          <a:fontRef idx="minor">
+            <a:schemeClr val="tx1"/>
+          </a:fontRef>
+        </p:style>
+      </p:cxnSp>
+      <p:sp>
+        <p:nvSpPr>
+          <p:cNvPr id="8" name="椭圆 7">
+            <a:extLst>
+              <a:ext uri="{FF2B5EF4-FFF2-40B4-BE49-F238E27FC236}">
+                <a16:creationId xmlns:a16="http://schemas.microsoft.com/office/drawing/2014/main" id="{7BCDB187-A407-8BE4-9FCA-E2B2FF5BC433}"/>
+              </a:ext>
+            </a:extLst>
+          </p:cNvPr>
+          <p:cNvSpPr/>
+          <p:nvPr/>
+        </p:nvSpPr>
+        <p:spPr>
+          <a:xfrm>
+            <a:off x="1560634" y="4502100"/>
+            <a:ext cx="216000" cy="216000"/>
+          </a:xfrm>
+          <a:prstGeom prst="ellipse">
+            <a:avLst/>
+          </a:prstGeom>
+          <a:solidFill>
+            <a:schemeClr val="bg1"/>
+          </a:solidFill>
+          <a:ln>
+            <a:solidFill>
+              <a:schemeClr val="tx1"/>
+            </a:solidFill>
+          </a:ln>
+        </p:spPr>
+        <p:style>
+          <a:lnRef idx="2">
+            <a:schemeClr val="accent1">
+              <a:shade val="15000"/>
+            </a:schemeClr>
+          </a:lnRef>
+          <a:fillRef idx="1">
+            <a:schemeClr val="accent1"/>
+          </a:fillRef>
+          <a:effectRef idx="0">
+            <a:schemeClr val="accent1"/>
+          </a:effectRef>
+          <a:fontRef idx="minor">
+            <a:schemeClr val="lt1"/>
+          </a:fontRef>
+        </p:style>
+        <p:txBody>
+          <a:bodyPr rtlCol="0" anchor="ctr"/>
+          <a:lstStyle/>
+          <a:p>
+            <a:pPr algn="ctr"/>
+            <a:endParaRPr lang="zh-CN" altLang="en-US"/>
+          </a:p>
+        </p:txBody>
+      </p:sp>
+      <p:cxnSp>
+        <p:nvCxnSpPr>
+          <p:cNvPr id="81" name="直接连接符 80">
+            <a:extLst>
+              <a:ext uri="{FF2B5EF4-FFF2-40B4-BE49-F238E27FC236}">
+                <a16:creationId xmlns:a16="http://schemas.microsoft.com/office/drawing/2014/main" id="{F5BD8E0B-01DC-C156-A643-CA4C96C772A3}"/>
+              </a:ext>
+            </a:extLst>
+          </p:cNvPr>
+          <p:cNvCxnSpPr>
+            <a:cxnSpLocks/>
+          </p:cNvCxnSpPr>
+          <p:nvPr/>
+        </p:nvCxnSpPr>
+        <p:spPr>
+          <a:xfrm flipV="1">
+            <a:off x="4371609" y="3414713"/>
+            <a:ext cx="0" cy="1090613"/>
+          </a:xfrm>
+          <a:prstGeom prst="line">
+            <a:avLst/>
+          </a:prstGeom>
+          <a:ln>
+            <a:headEnd type="none"/>
+            <a:tailEnd type="oval"/>
+          </a:ln>
+        </p:spPr>
+        <p:style>
+          <a:lnRef idx="2">
+            <a:schemeClr val="dk1"/>
+          </a:lnRef>
+          <a:fillRef idx="0">
+            <a:schemeClr val="dk1"/>
+          </a:fillRef>
+          <a:effectRef idx="1">
+            <a:schemeClr val="dk1"/>
+          </a:effectRef>
+          <a:fontRef idx="minor">
+            <a:schemeClr val="tx1"/>
+          </a:fontRef>
+        </p:style>
+      </p:cxnSp>
+      <p:sp>
+        <p:nvSpPr>
+          <p:cNvPr id="82" name="椭圆 81">
+            <a:extLst>
+              <a:ext uri="{FF2B5EF4-FFF2-40B4-BE49-F238E27FC236}">
+                <a16:creationId xmlns:a16="http://schemas.microsoft.com/office/drawing/2014/main" id="{1C2299FE-1D4D-626D-7BFF-CF639FE4E586}"/>
+              </a:ext>
+            </a:extLst>
+          </p:cNvPr>
+          <p:cNvSpPr>
+            <a:spLocks noChangeAspect="1"/>
+          </p:cNvSpPr>
+          <p:nvPr/>
+        </p:nvSpPr>
+        <p:spPr>
+          <a:xfrm>
+            <a:off x="3022905" y="3394725"/>
+            <a:ext cx="76272" cy="78075"/>
+          </a:xfrm>
+          <a:prstGeom prst="ellipse">
+            <a:avLst/>
+          </a:prstGeom>
+          <a:solidFill>
+            <a:schemeClr val="tx1"/>
+          </a:solidFill>
+          <a:ln>
+            <a:noFill/>
+          </a:ln>
+        </p:spPr>
+        <p:style>
+          <a:lnRef idx="2">
+            <a:schemeClr val="accent1">
+              <a:shade val="15000"/>
+            </a:schemeClr>
+          </a:lnRef>
+          <a:fillRef idx="1">
+            <a:schemeClr val="accent1"/>
+          </a:fillRef>
+          <a:effectRef idx="0">
+            <a:schemeClr val="accent1"/>
+          </a:effectRef>
+          <a:fontRef idx="minor">
+            <a:schemeClr val="lt1"/>
+          </a:fontRef>
+        </p:style>
+        <p:txBody>
+          <a:bodyPr rtlCol="0" anchor="ctr"/>
+          <a:lstStyle/>
+          <a:p>
+            <a:pPr algn="ctr"/>
+            <a:endParaRPr lang="zh-CN" altLang="en-US"/>
+          </a:p>
+        </p:txBody>
+      </p:sp>
+      <p:sp>
+        <p:nvSpPr>
+          <p:cNvPr id="83" name="文本框 82">
+            <a:extLst>
+              <a:ext uri="{FF2B5EF4-FFF2-40B4-BE49-F238E27FC236}">
+                <a16:creationId xmlns:a16="http://schemas.microsoft.com/office/drawing/2014/main" id="{0EFA9116-D5DA-1E82-FC23-C73C84D81CBD}"/>
+              </a:ext>
+            </a:extLst>
+          </p:cNvPr>
+          <p:cNvSpPr txBox="1"/>
+          <p:nvPr/>
+        </p:nvSpPr>
+        <p:spPr>
+          <a:xfrm>
+            <a:off x="2537025" y="3480396"/>
+            <a:ext cx="1085582" cy="307777"/>
+          </a:xfrm>
+          <a:prstGeom prst="rect">
+            <a:avLst/>
+          </a:prstGeom>
+          <a:noFill/>
+        </p:spPr>
+        <p:txBody>
+          <a:bodyPr wrap="square" rtlCol="0">
+            <a:spAutoFit/>
+          </a:bodyPr>
+          <a:lstStyle/>
+          <a:p>
+            <a:pPr algn="ctr"/>
+            <a:r>
+              <a:rPr lang="en-US" altLang="zh-CN" sz="1400" dirty="0">
+                <a:latin typeface="Times New Roman" panose="02020603050405020304" pitchFamily="18" charset="0"/>
+                <a:cs typeface="Times New Roman" panose="02020603050405020304" pitchFamily="18" charset="0"/>
+              </a:rPr>
+              <a:t>11</a:t>
+            </a:r>
+            <a:r>
+              <a:rPr lang="en-US" altLang="zh-CN" sz="1400" dirty="0">
+                <a:solidFill>
+                  <a:srgbClr val="FF0000"/>
+                </a:solidFill>
+                <a:latin typeface="Times New Roman" panose="02020603050405020304" pitchFamily="18" charset="0"/>
+                <a:cs typeface="Times New Roman" panose="02020603050405020304" pitchFamily="18" charset="0"/>
+              </a:rPr>
+              <a:t>FFAA</a:t>
+            </a:r>
+            <a:r>
+              <a:rPr lang="en-US" altLang="zh-CN" sz="1400" dirty="0">
+                <a:latin typeface="Times New Roman" panose="02020603050405020304" pitchFamily="18" charset="0"/>
+                <a:cs typeface="Times New Roman" panose="02020603050405020304" pitchFamily="18" charset="0"/>
+              </a:rPr>
+              <a:t>00</a:t>
+            </a:r>
+            <a:endParaRPr lang="zh-CN" altLang="en-US" sz="1400" dirty="0">
+              <a:latin typeface="Times New Roman" panose="02020603050405020304" pitchFamily="18" charset="0"/>
+              <a:cs typeface="Times New Roman" panose="02020603050405020304" pitchFamily="18" charset="0"/>
+            </a:endParaRPr>
+          </a:p>
+        </p:txBody>
+      </p:sp>
+      <p:cxnSp>
+        <p:nvCxnSpPr>
+          <p:cNvPr id="86" name="直接连接符 85">
+            <a:extLst>
+              <a:ext uri="{FF2B5EF4-FFF2-40B4-BE49-F238E27FC236}">
+                <a16:creationId xmlns:a16="http://schemas.microsoft.com/office/drawing/2014/main" id="{D13642CF-6481-32C5-CFB0-D07FBF81B04F}"/>
+              </a:ext>
+            </a:extLst>
+          </p:cNvPr>
+          <p:cNvCxnSpPr>
+            <a:cxnSpLocks/>
+          </p:cNvCxnSpPr>
+          <p:nvPr/>
+        </p:nvCxnSpPr>
+        <p:spPr>
+          <a:xfrm>
+            <a:off x="7309321" y="3429000"/>
+            <a:ext cx="2697407" cy="0"/>
+          </a:xfrm>
+          <a:prstGeom prst="line">
+            <a:avLst/>
+          </a:prstGeom>
+          <a:ln w="9525">
+            <a:solidFill>
+              <a:schemeClr val="bg1">
+                <a:lumMod val="75000"/>
+              </a:schemeClr>
+            </a:solidFill>
+            <a:prstDash val="dash"/>
+            <a:headEnd type="none"/>
+            <a:tailEnd type="none"/>
+          </a:ln>
+        </p:spPr>
+        <p:style>
+          <a:lnRef idx="2">
+            <a:schemeClr val="dk1"/>
+          </a:lnRef>
+          <a:fillRef idx="0">
+            <a:schemeClr val="dk1"/>
+          </a:fillRef>
+          <a:effectRef idx="1">
+            <a:schemeClr val="dk1"/>
+          </a:effectRef>
+          <a:fontRef idx="minor">
+            <a:schemeClr val="tx1"/>
+          </a:fontRef>
+        </p:style>
+      </p:cxnSp>
+      <p:cxnSp>
+        <p:nvCxnSpPr>
+          <p:cNvPr id="87" name="直接连接符 86">
+            <a:extLst>
+              <a:ext uri="{FF2B5EF4-FFF2-40B4-BE49-F238E27FC236}">
+                <a16:creationId xmlns:a16="http://schemas.microsoft.com/office/drawing/2014/main" id="{AE93E0BC-E8FC-E368-8873-EC8344E03F33}"/>
+              </a:ext>
+            </a:extLst>
+          </p:cNvPr>
+          <p:cNvCxnSpPr>
+            <a:cxnSpLocks/>
+          </p:cNvCxnSpPr>
+          <p:nvPr/>
+        </p:nvCxnSpPr>
+        <p:spPr>
+          <a:xfrm>
+            <a:off x="8691744" y="2155140"/>
+            <a:ext cx="0" cy="2454960"/>
+          </a:xfrm>
+          <a:prstGeom prst="line">
+            <a:avLst/>
+          </a:prstGeom>
+          <a:ln w="9525">
+            <a:solidFill>
+              <a:schemeClr val="bg1">
+                <a:lumMod val="75000"/>
+              </a:schemeClr>
+            </a:solidFill>
+            <a:prstDash val="dash"/>
+            <a:headEnd type="none"/>
+            <a:tailEnd type="none"/>
+          </a:ln>
+        </p:spPr>
+        <p:style>
+          <a:lnRef idx="2">
+            <a:schemeClr val="dk1"/>
+          </a:lnRef>
+          <a:fillRef idx="0">
+            <a:schemeClr val="dk1"/>
+          </a:fillRef>
+          <a:effectRef idx="1">
+            <a:schemeClr val="dk1"/>
+          </a:effectRef>
+          <a:fontRef idx="minor">
+            <a:schemeClr val="tx1"/>
+          </a:fontRef>
+        </p:style>
+      </p:cxnSp>
+      <p:sp>
+        <p:nvSpPr>
+          <p:cNvPr id="88" name="spiral_319244">
+            <a:extLst>
+              <a:ext uri="{FF2B5EF4-FFF2-40B4-BE49-F238E27FC236}">
+                <a16:creationId xmlns:a16="http://schemas.microsoft.com/office/drawing/2014/main" id="{86F6EA5A-1C34-4800-FD23-D5AF567B99D8}"/>
+              </a:ext>
+            </a:extLst>
+          </p:cNvPr>
+          <p:cNvSpPr>
+            <a:spLocks noChangeAspect="1"/>
+          </p:cNvSpPr>
+          <p:nvPr/>
+        </p:nvSpPr>
+        <p:spPr>
+          <a:xfrm rot="5400000">
+            <a:off x="9829653" y="1988624"/>
+            <a:ext cx="354150" cy="345379"/>
+          </a:xfrm>
+          <a:custGeom>
+            <a:avLst/>
+            <a:gdLst>
+              <a:gd name="T0" fmla="*/ 6057 w 7078"/>
+              <a:gd name="T1" fmla="*/ 1966 h 6914"/>
+              <a:gd name="T2" fmla="*/ 3017 w 7078"/>
+              <a:gd name="T3" fmla="*/ 1966 h 6914"/>
+              <a:gd name="T4" fmla="*/ 3017 w 7078"/>
+              <a:gd name="T5" fmla="*/ 4478 h 6914"/>
+              <a:gd name="T6" fmla="*/ 5107 w 7078"/>
+              <a:gd name="T7" fmla="*/ 4478 h 6914"/>
+              <a:gd name="T8" fmla="*/ 5107 w 7078"/>
+              <a:gd name="T9" fmla="*/ 2725 h 6914"/>
+              <a:gd name="T10" fmla="*/ 3625 w 7078"/>
+              <a:gd name="T11" fmla="*/ 2725 h 6914"/>
+              <a:gd name="T12" fmla="*/ 3624 w 7078"/>
+              <a:gd name="T13" fmla="*/ 3128 h 6914"/>
+              <a:gd name="T14" fmla="*/ 4027 w 7078"/>
+              <a:gd name="T15" fmla="*/ 3128 h 6914"/>
+              <a:gd name="T16" fmla="*/ 4705 w 7078"/>
+              <a:gd name="T17" fmla="*/ 3128 h 6914"/>
+              <a:gd name="T18" fmla="*/ 4705 w 7078"/>
+              <a:gd name="T19" fmla="*/ 4076 h 6914"/>
+              <a:gd name="T20" fmla="*/ 3419 w 7078"/>
+              <a:gd name="T21" fmla="*/ 4076 h 6914"/>
+              <a:gd name="T22" fmla="*/ 3419 w 7078"/>
+              <a:gd name="T23" fmla="*/ 2368 h 6914"/>
+              <a:gd name="T24" fmla="*/ 5655 w 7078"/>
+              <a:gd name="T25" fmla="*/ 2368 h 6914"/>
+              <a:gd name="T26" fmla="*/ 5655 w 7078"/>
+              <a:gd name="T27" fmla="*/ 5263 h 6914"/>
+              <a:gd name="T28" fmla="*/ 1936 w 7078"/>
+              <a:gd name="T29" fmla="*/ 5263 h 6914"/>
+              <a:gd name="T30" fmla="*/ 1936 w 7078"/>
+              <a:gd name="T31" fmla="*/ 514 h 6914"/>
+              <a:gd name="T32" fmla="*/ 1936 w 7078"/>
+              <a:gd name="T33" fmla="*/ 111 h 6914"/>
+              <a:gd name="T34" fmla="*/ 1533 w 7078"/>
+              <a:gd name="T35" fmla="*/ 111 h 6914"/>
+              <a:gd name="T36" fmla="*/ 1533 w 7078"/>
+              <a:gd name="T37" fmla="*/ 5665 h 6914"/>
+              <a:gd name="T38" fmla="*/ 6057 w 7078"/>
+              <a:gd name="T39" fmla="*/ 5665 h 6914"/>
+              <a:gd name="T40" fmla="*/ 6057 w 7078"/>
+              <a:gd name="T41" fmla="*/ 1966 h 6914"/>
+            </a:gdLst>
+            <a:ahLst/>
+            <a:cxnLst>
+              <a:cxn ang="0">
+                <a:pos x="T0" y="T1"/>
+              </a:cxn>
+              <a:cxn ang="0">
+                <a:pos x="T2" y="T3"/>
+              </a:cxn>
+              <a:cxn ang="0">
+                <a:pos x="T4" y="T5"/>
+              </a:cxn>
+              <a:cxn ang="0">
+                <a:pos x="T6" y="T7"/>
+              </a:cxn>
+              <a:cxn ang="0">
+                <a:pos x="T8" y="T9"/>
+              </a:cxn>
+              <a:cxn ang="0">
+                <a:pos x="T10" y="T11"/>
+              </a:cxn>
+              <a:cxn ang="0">
+                <a:pos x="T12" y="T13"/>
+              </a:cxn>
+              <a:cxn ang="0">
+                <a:pos x="T14" y="T15"/>
+              </a:cxn>
+              <a:cxn ang="0">
+                <a:pos x="T16" y="T17"/>
+              </a:cxn>
+              <a:cxn ang="0">
+                <a:pos x="T18" y="T19"/>
+              </a:cxn>
+              <a:cxn ang="0">
+                <a:pos x="T20" y="T21"/>
+              </a:cxn>
+              <a:cxn ang="0">
+                <a:pos x="T22" y="T23"/>
+              </a:cxn>
+              <a:cxn ang="0">
+                <a:pos x="T24" y="T25"/>
+              </a:cxn>
+              <a:cxn ang="0">
+                <a:pos x="T26" y="T27"/>
+              </a:cxn>
+              <a:cxn ang="0">
+                <a:pos x="T28" y="T29"/>
+              </a:cxn>
+              <a:cxn ang="0">
+                <a:pos x="T30" y="T31"/>
+              </a:cxn>
+              <a:cxn ang="0">
+                <a:pos x="T32" y="T33"/>
+              </a:cxn>
+              <a:cxn ang="0">
+                <a:pos x="T34" y="T35"/>
+              </a:cxn>
+              <a:cxn ang="0">
+                <a:pos x="T36" y="T37"/>
+              </a:cxn>
+              <a:cxn ang="0">
+                <a:pos x="T38" y="T39"/>
+              </a:cxn>
+              <a:cxn ang="0">
+                <a:pos x="T40" y="T41"/>
+              </a:cxn>
+            </a:cxnLst>
+            <a:rect l="0" t="0" r="r" b="b"/>
+            <a:pathLst>
+              <a:path w="7078" h="6914">
+                <a:moveTo>
+                  <a:pt x="6057" y="1966"/>
+                </a:moveTo>
+                <a:cubicBezTo>
+                  <a:pt x="5217" y="1126"/>
+                  <a:pt x="3856" y="1126"/>
+                  <a:pt x="3017" y="1966"/>
+                </a:cubicBezTo>
+                <a:cubicBezTo>
+                  <a:pt x="2323" y="2659"/>
+                  <a:pt x="2323" y="3785"/>
+                  <a:pt x="3017" y="4478"/>
+                </a:cubicBezTo>
+                <a:cubicBezTo>
+                  <a:pt x="3594" y="5055"/>
+                  <a:pt x="4530" y="5055"/>
+                  <a:pt x="5107" y="4478"/>
+                </a:cubicBezTo>
+                <a:cubicBezTo>
+                  <a:pt x="5591" y="3994"/>
+                  <a:pt x="5591" y="3209"/>
+                  <a:pt x="5107" y="2725"/>
+                </a:cubicBezTo>
+                <a:cubicBezTo>
+                  <a:pt x="4698" y="2316"/>
+                  <a:pt x="4034" y="2316"/>
+                  <a:pt x="3625" y="2725"/>
+                </a:cubicBezTo>
+                <a:cubicBezTo>
+                  <a:pt x="3514" y="2836"/>
+                  <a:pt x="3513" y="3016"/>
+                  <a:pt x="3624" y="3128"/>
+                </a:cubicBezTo>
+                <a:cubicBezTo>
+                  <a:pt x="3735" y="3239"/>
+                  <a:pt x="3916" y="3239"/>
+                  <a:pt x="4027" y="3128"/>
+                </a:cubicBezTo>
+                <a:cubicBezTo>
+                  <a:pt x="4214" y="2941"/>
+                  <a:pt x="4518" y="2941"/>
+                  <a:pt x="4705" y="3128"/>
+                </a:cubicBezTo>
+                <a:cubicBezTo>
+                  <a:pt x="4967" y="3389"/>
+                  <a:pt x="4967" y="3814"/>
+                  <a:pt x="4705" y="4076"/>
+                </a:cubicBezTo>
+                <a:cubicBezTo>
+                  <a:pt x="4350" y="4431"/>
+                  <a:pt x="3774" y="4431"/>
+                  <a:pt x="3419" y="4076"/>
+                </a:cubicBezTo>
+                <a:cubicBezTo>
+                  <a:pt x="2948" y="3604"/>
+                  <a:pt x="2948" y="2840"/>
+                  <a:pt x="3419" y="2368"/>
+                </a:cubicBezTo>
+                <a:cubicBezTo>
+                  <a:pt x="4036" y="1751"/>
+                  <a:pt x="5037" y="1751"/>
+                  <a:pt x="5655" y="2368"/>
+                </a:cubicBezTo>
+                <a:cubicBezTo>
+                  <a:pt x="6454" y="3168"/>
+                  <a:pt x="6454" y="4463"/>
+                  <a:pt x="5655" y="5263"/>
+                </a:cubicBezTo>
+                <a:cubicBezTo>
+                  <a:pt x="4628" y="6290"/>
+                  <a:pt x="2963" y="6290"/>
+                  <a:pt x="1936" y="5263"/>
+                </a:cubicBezTo>
+                <a:cubicBezTo>
+                  <a:pt x="624" y="3951"/>
+                  <a:pt x="624" y="1825"/>
+                  <a:pt x="1936" y="514"/>
+                </a:cubicBezTo>
+                <a:cubicBezTo>
+                  <a:pt x="2047" y="403"/>
+                  <a:pt x="2047" y="222"/>
+                  <a:pt x="1936" y="111"/>
+                </a:cubicBezTo>
+                <a:cubicBezTo>
+                  <a:pt x="1825" y="0"/>
+                  <a:pt x="1644" y="0"/>
+                  <a:pt x="1533" y="111"/>
+                </a:cubicBezTo>
+                <a:cubicBezTo>
+                  <a:pt x="0" y="1645"/>
+                  <a:pt x="0" y="4132"/>
+                  <a:pt x="1533" y="5665"/>
+                </a:cubicBezTo>
+                <a:cubicBezTo>
+                  <a:pt x="2782" y="6914"/>
+                  <a:pt x="4808" y="6914"/>
+                  <a:pt x="6057" y="5665"/>
+                </a:cubicBezTo>
+                <a:cubicBezTo>
+                  <a:pt x="7078" y="4644"/>
+                  <a:pt x="7078" y="2988"/>
+                  <a:pt x="6057" y="1966"/>
+                </a:cubicBezTo>
+                <a:close/>
+              </a:path>
+            </a:pathLst>
+          </a:custGeom>
+          <a:solidFill>
+            <a:srgbClr val="00B050"/>
+          </a:solidFill>
+          <a:ln>
+            <a:noFill/>
+          </a:ln>
+        </p:spPr>
+        <p:style>
+          <a:lnRef idx="2">
+            <a:schemeClr val="accent1">
+              <a:shade val="50000"/>
+            </a:schemeClr>
+          </a:lnRef>
+          <a:fillRef idx="1">
+            <a:schemeClr val="accent1"/>
+          </a:fillRef>
+          <a:effectRef idx="0">
+            <a:schemeClr val="accent1"/>
+          </a:effectRef>
+          <a:fontRef idx="minor">
+            <a:schemeClr val="lt1"/>
+          </a:fontRef>
+        </p:style>
+        <p:txBody>
+          <a:bodyPr rtlCol="0" anchor="ctr"/>
+          <a:lstStyle/>
+          <a:p>
+            <a:pPr algn="ctr"/>
+            <a:endParaRPr lang="en-US"/>
+          </a:p>
+        </p:txBody>
+      </p:sp>
+      <p:cxnSp>
+        <p:nvCxnSpPr>
+          <p:cNvPr id="89" name="直接连接符 88">
+            <a:extLst>
+              <a:ext uri="{FF2B5EF4-FFF2-40B4-BE49-F238E27FC236}">
+                <a16:creationId xmlns:a16="http://schemas.microsoft.com/office/drawing/2014/main" id="{218EEAC0-1103-57F9-5DC8-59EE9F56EE9D}"/>
+              </a:ext>
+            </a:extLst>
+          </p:cNvPr>
+          <p:cNvCxnSpPr>
+            <a:cxnSpLocks/>
+          </p:cNvCxnSpPr>
+          <p:nvPr/>
+        </p:nvCxnSpPr>
+        <p:spPr>
+          <a:xfrm>
+            <a:off x="7309321" y="4610100"/>
+            <a:ext cx="1380084" cy="0"/>
+          </a:xfrm>
+          <a:prstGeom prst="line">
+            <a:avLst/>
+          </a:prstGeom>
+          <a:ln>
+            <a:headEnd type="oval"/>
+            <a:tailEnd type="oval"/>
+          </a:ln>
+        </p:spPr>
+        <p:style>
+          <a:lnRef idx="2">
+            <a:schemeClr val="dk1"/>
+          </a:lnRef>
+          <a:fillRef idx="0">
+            <a:schemeClr val="dk1"/>
+          </a:fillRef>
+          <a:effectRef idx="1">
+            <a:schemeClr val="dk1"/>
+          </a:effectRef>
+          <a:fontRef idx="minor">
+            <a:schemeClr val="tx1"/>
+          </a:fontRef>
+        </p:style>
+      </p:cxnSp>
+      <p:cxnSp>
+        <p:nvCxnSpPr>
+          <p:cNvPr id="90" name="直接连接符 89">
+            <a:extLst>
+              <a:ext uri="{FF2B5EF4-FFF2-40B4-BE49-F238E27FC236}">
+                <a16:creationId xmlns:a16="http://schemas.microsoft.com/office/drawing/2014/main" id="{0BAAD796-7884-4A61-57B5-846B4D0E599C}"/>
+              </a:ext>
+            </a:extLst>
+          </p:cNvPr>
+          <p:cNvCxnSpPr>
+            <a:cxnSpLocks/>
+          </p:cNvCxnSpPr>
+          <p:nvPr/>
+        </p:nvCxnSpPr>
+        <p:spPr>
+          <a:xfrm flipV="1">
+            <a:off x="7309321" y="2166938"/>
+            <a:ext cx="0" cy="1262062"/>
+          </a:xfrm>
+          <a:prstGeom prst="line">
+            <a:avLst/>
+          </a:prstGeom>
+          <a:ln>
+            <a:headEnd type="none"/>
+            <a:tailEnd type="none"/>
+          </a:ln>
+        </p:spPr>
+        <p:style>
+          <a:lnRef idx="2">
+            <a:schemeClr val="dk1"/>
+          </a:lnRef>
+          <a:fillRef idx="0">
+            <a:schemeClr val="dk1"/>
+          </a:fillRef>
+          <a:effectRef idx="1">
+            <a:schemeClr val="dk1"/>
+          </a:effectRef>
+          <a:fontRef idx="minor">
+            <a:schemeClr val="tx1"/>
+          </a:fontRef>
+        </p:style>
+      </p:cxnSp>
+      <p:cxnSp>
+        <p:nvCxnSpPr>
+          <p:cNvPr id="91" name="直接连接符 90">
+            <a:extLst>
+              <a:ext uri="{FF2B5EF4-FFF2-40B4-BE49-F238E27FC236}">
+                <a16:creationId xmlns:a16="http://schemas.microsoft.com/office/drawing/2014/main" id="{3A176501-085D-8174-589F-016EEAAB1213}"/>
+              </a:ext>
+            </a:extLst>
+          </p:cNvPr>
+          <p:cNvCxnSpPr>
+            <a:cxnSpLocks/>
+          </p:cNvCxnSpPr>
+          <p:nvPr/>
+        </p:nvCxnSpPr>
+        <p:spPr>
+          <a:xfrm>
+            <a:off x="8689405" y="2155140"/>
+            <a:ext cx="1146239" cy="0"/>
+          </a:xfrm>
+          <a:prstGeom prst="line">
+            <a:avLst/>
+          </a:prstGeom>
+          <a:ln>
+            <a:headEnd type="none"/>
+            <a:tailEnd type="none"/>
+          </a:ln>
+        </p:spPr>
+        <p:style>
+          <a:lnRef idx="2">
+            <a:schemeClr val="dk1"/>
+          </a:lnRef>
+          <a:fillRef idx="0">
+            <a:schemeClr val="dk1"/>
+          </a:fillRef>
+          <a:effectRef idx="1">
+            <a:schemeClr val="dk1"/>
+          </a:effectRef>
+          <a:fontRef idx="minor">
+            <a:schemeClr val="tx1"/>
+          </a:fontRef>
+        </p:style>
+      </p:cxnSp>
+      <p:cxnSp>
+        <p:nvCxnSpPr>
+          <p:cNvPr id="92" name="直接连接符 91">
+            <a:extLst>
+              <a:ext uri="{FF2B5EF4-FFF2-40B4-BE49-F238E27FC236}">
+                <a16:creationId xmlns:a16="http://schemas.microsoft.com/office/drawing/2014/main" id="{C37E4029-3DCE-DAA7-1DD6-362E030CF031}"/>
+              </a:ext>
+            </a:extLst>
+          </p:cNvPr>
+          <p:cNvCxnSpPr>
+            <a:cxnSpLocks/>
+          </p:cNvCxnSpPr>
+          <p:nvPr/>
+        </p:nvCxnSpPr>
+        <p:spPr>
+          <a:xfrm flipV="1">
+            <a:off x="10006728" y="2343150"/>
+            <a:ext cx="0" cy="1090613"/>
+          </a:xfrm>
+          <a:prstGeom prst="line">
+            <a:avLst/>
+          </a:prstGeom>
+          <a:ln>
+            <a:headEnd type="none"/>
+            <a:tailEnd type="none"/>
+          </a:ln>
+        </p:spPr>
+        <p:style>
+          <a:lnRef idx="2">
+            <a:schemeClr val="dk1"/>
+          </a:lnRef>
+          <a:fillRef idx="0">
+            <a:schemeClr val="dk1"/>
+          </a:fillRef>
+          <a:effectRef idx="1">
+            <a:schemeClr val="dk1"/>
+          </a:effectRef>
+          <a:fontRef idx="minor">
+            <a:schemeClr val="tx1"/>
+          </a:fontRef>
+        </p:style>
+      </p:cxnSp>
+      <p:cxnSp>
+        <p:nvCxnSpPr>
+          <p:cNvPr id="93" name="直接连接符 92">
+            <a:extLst>
+              <a:ext uri="{FF2B5EF4-FFF2-40B4-BE49-F238E27FC236}">
+                <a16:creationId xmlns:a16="http://schemas.microsoft.com/office/drawing/2014/main" id="{40576205-1B4F-9E1E-8567-606DFC1E10F6}"/>
+              </a:ext>
+            </a:extLst>
+          </p:cNvPr>
+          <p:cNvCxnSpPr>
+            <a:cxnSpLocks/>
+          </p:cNvCxnSpPr>
+          <p:nvPr/>
+        </p:nvCxnSpPr>
+        <p:spPr>
+          <a:xfrm>
+            <a:off x="6482990" y="3429000"/>
+            <a:ext cx="459619" cy="0"/>
+          </a:xfrm>
+          <a:prstGeom prst="line">
+            <a:avLst/>
+          </a:prstGeom>
+          <a:ln>
+            <a:headEnd type="none"/>
+            <a:tailEnd type="none"/>
+          </a:ln>
+        </p:spPr>
+        <p:style>
+          <a:lnRef idx="2">
+            <a:schemeClr val="dk1"/>
+          </a:lnRef>
+          <a:fillRef idx="0">
+            <a:schemeClr val="dk1"/>
+          </a:fillRef>
+          <a:effectRef idx="1">
+            <a:schemeClr val="dk1"/>
+          </a:effectRef>
+          <a:fontRef idx="minor">
+            <a:schemeClr val="tx1"/>
+          </a:fontRef>
+        </p:style>
+      </p:cxnSp>
+      <p:cxnSp>
+        <p:nvCxnSpPr>
+          <p:cNvPr id="94" name="直接连接符 93">
+            <a:extLst>
+              <a:ext uri="{FF2B5EF4-FFF2-40B4-BE49-F238E27FC236}">
+                <a16:creationId xmlns:a16="http://schemas.microsoft.com/office/drawing/2014/main" id="{C5A1B848-26A0-12D3-81D1-F293D1B063EA}"/>
+              </a:ext>
+            </a:extLst>
+          </p:cNvPr>
+          <p:cNvCxnSpPr>
+            <a:cxnSpLocks/>
+          </p:cNvCxnSpPr>
+          <p:nvPr/>
+        </p:nvCxnSpPr>
+        <p:spPr>
+          <a:xfrm>
+            <a:off x="8695105" y="1110205"/>
+            <a:ext cx="0" cy="613820"/>
+          </a:xfrm>
+          <a:prstGeom prst="line">
+            <a:avLst/>
+          </a:prstGeom>
+          <a:ln>
+            <a:headEnd type="none"/>
+            <a:tailEnd type="none"/>
+          </a:ln>
+        </p:spPr>
+        <p:style>
+          <a:lnRef idx="2">
+            <a:schemeClr val="dk1"/>
+          </a:lnRef>
+          <a:fillRef idx="0">
+            <a:schemeClr val="dk1"/>
+          </a:fillRef>
+          <a:effectRef idx="1">
+            <a:schemeClr val="dk1"/>
+          </a:effectRef>
+          <a:fontRef idx="minor">
+            <a:schemeClr val="tx1"/>
+          </a:fontRef>
+        </p:style>
+      </p:cxnSp>
+      <p:cxnSp>
+        <p:nvCxnSpPr>
+          <p:cNvPr id="95" name="直接连接符 94">
+            <a:extLst>
+              <a:ext uri="{FF2B5EF4-FFF2-40B4-BE49-F238E27FC236}">
+                <a16:creationId xmlns:a16="http://schemas.microsoft.com/office/drawing/2014/main" id="{825EF018-EF98-3ADF-B2BD-468B65A53493}"/>
+              </a:ext>
+            </a:extLst>
+          </p:cNvPr>
+          <p:cNvCxnSpPr>
+            <a:cxnSpLocks/>
+          </p:cNvCxnSpPr>
+          <p:nvPr/>
+        </p:nvCxnSpPr>
+        <p:spPr>
+          <a:xfrm flipV="1">
+            <a:off x="8684895" y="5043488"/>
+            <a:ext cx="0" cy="695706"/>
+          </a:xfrm>
+          <a:prstGeom prst="line">
+            <a:avLst/>
+          </a:prstGeom>
+          <a:ln>
+            <a:headEnd type="none"/>
+            <a:tailEnd type="none"/>
+          </a:ln>
+        </p:spPr>
+        <p:style>
+          <a:lnRef idx="2">
+            <a:schemeClr val="dk1"/>
+          </a:lnRef>
+          <a:fillRef idx="0">
+            <a:schemeClr val="dk1"/>
+          </a:fillRef>
+          <a:effectRef idx="1">
+            <a:schemeClr val="dk1"/>
+          </a:effectRef>
+          <a:fontRef idx="minor">
+            <a:schemeClr val="tx1"/>
+          </a:fontRef>
+        </p:style>
+      </p:cxnSp>
+      <p:cxnSp>
+        <p:nvCxnSpPr>
+          <p:cNvPr id="96" name="直接连接符 95">
+            <a:extLst>
+              <a:ext uri="{FF2B5EF4-FFF2-40B4-BE49-F238E27FC236}">
+                <a16:creationId xmlns:a16="http://schemas.microsoft.com/office/drawing/2014/main" id="{039940A6-CD82-4955-209E-4B943BA733E8}"/>
+              </a:ext>
+            </a:extLst>
+          </p:cNvPr>
+          <p:cNvCxnSpPr>
+            <a:cxnSpLocks/>
+          </p:cNvCxnSpPr>
+          <p:nvPr/>
+        </p:nvCxnSpPr>
+        <p:spPr>
+          <a:xfrm flipH="1">
+            <a:off x="10357531" y="3429000"/>
+            <a:ext cx="549641" cy="0"/>
+          </a:xfrm>
+          <a:prstGeom prst="line">
+            <a:avLst/>
+          </a:prstGeom>
+          <a:ln>
+            <a:headEnd type="none"/>
+            <a:tailEnd type="none"/>
+          </a:ln>
+        </p:spPr>
+        <p:style>
+          <a:lnRef idx="2">
+            <a:schemeClr val="dk1"/>
+          </a:lnRef>
+          <a:fillRef idx="0">
+            <a:schemeClr val="dk1"/>
+          </a:fillRef>
+          <a:effectRef idx="1">
+            <a:schemeClr val="dk1"/>
+          </a:effectRef>
+          <a:fontRef idx="minor">
+            <a:schemeClr val="tx1"/>
+          </a:fontRef>
+        </p:style>
+      </p:cxnSp>
+      <p:sp>
+        <p:nvSpPr>
+          <p:cNvPr id="97" name="spiral_319244">
+            <a:extLst>
+              <a:ext uri="{FF2B5EF4-FFF2-40B4-BE49-F238E27FC236}">
+                <a16:creationId xmlns:a16="http://schemas.microsoft.com/office/drawing/2014/main" id="{2028654E-258B-AF5E-FFD3-FB0564A7EAF2}"/>
+              </a:ext>
+            </a:extLst>
+          </p:cNvPr>
+          <p:cNvSpPr>
+            <a:spLocks noChangeAspect="1"/>
+          </p:cNvSpPr>
+          <p:nvPr/>
+        </p:nvSpPr>
+        <p:spPr>
+          <a:xfrm rot="5400000">
+            <a:off x="8534801" y="1752900"/>
+            <a:ext cx="354150" cy="345379"/>
+          </a:xfrm>
+          <a:custGeom>
+            <a:avLst/>
+            <a:gdLst>
+              <a:gd name="T0" fmla="*/ 6057 w 7078"/>
+              <a:gd name="T1" fmla="*/ 1966 h 6914"/>
+              <a:gd name="T2" fmla="*/ 3017 w 7078"/>
+              <a:gd name="T3" fmla="*/ 1966 h 6914"/>
+              <a:gd name="T4" fmla="*/ 3017 w 7078"/>
+              <a:gd name="T5" fmla="*/ 4478 h 6914"/>
+              <a:gd name="T6" fmla="*/ 5107 w 7078"/>
+              <a:gd name="T7" fmla="*/ 4478 h 6914"/>
+              <a:gd name="T8" fmla="*/ 5107 w 7078"/>
+              <a:gd name="T9" fmla="*/ 2725 h 6914"/>
+              <a:gd name="T10" fmla="*/ 3625 w 7078"/>
+              <a:gd name="T11" fmla="*/ 2725 h 6914"/>
+              <a:gd name="T12" fmla="*/ 3624 w 7078"/>
+              <a:gd name="T13" fmla="*/ 3128 h 6914"/>
+              <a:gd name="T14" fmla="*/ 4027 w 7078"/>
+              <a:gd name="T15" fmla="*/ 3128 h 6914"/>
+              <a:gd name="T16" fmla="*/ 4705 w 7078"/>
+              <a:gd name="T17" fmla="*/ 3128 h 6914"/>
+              <a:gd name="T18" fmla="*/ 4705 w 7078"/>
+              <a:gd name="T19" fmla="*/ 4076 h 6914"/>
+              <a:gd name="T20" fmla="*/ 3419 w 7078"/>
+              <a:gd name="T21" fmla="*/ 4076 h 6914"/>
+              <a:gd name="T22" fmla="*/ 3419 w 7078"/>
+              <a:gd name="T23" fmla="*/ 2368 h 6914"/>
+              <a:gd name="T24" fmla="*/ 5655 w 7078"/>
+              <a:gd name="T25" fmla="*/ 2368 h 6914"/>
+              <a:gd name="T26" fmla="*/ 5655 w 7078"/>
+              <a:gd name="T27" fmla="*/ 5263 h 6914"/>
+              <a:gd name="T28" fmla="*/ 1936 w 7078"/>
+              <a:gd name="T29" fmla="*/ 5263 h 6914"/>
+              <a:gd name="T30" fmla="*/ 1936 w 7078"/>
+              <a:gd name="T31" fmla="*/ 514 h 6914"/>
+              <a:gd name="T32" fmla="*/ 1936 w 7078"/>
+              <a:gd name="T33" fmla="*/ 111 h 6914"/>
+              <a:gd name="T34" fmla="*/ 1533 w 7078"/>
+              <a:gd name="T35" fmla="*/ 111 h 6914"/>
+              <a:gd name="T36" fmla="*/ 1533 w 7078"/>
+              <a:gd name="T37" fmla="*/ 5665 h 6914"/>
+              <a:gd name="T38" fmla="*/ 6057 w 7078"/>
+              <a:gd name="T39" fmla="*/ 5665 h 6914"/>
+              <a:gd name="T40" fmla="*/ 6057 w 7078"/>
+              <a:gd name="T41" fmla="*/ 1966 h 6914"/>
+            </a:gdLst>
+            <a:ahLst/>
+            <a:cxnLst>
+              <a:cxn ang="0">
+                <a:pos x="T0" y="T1"/>
+              </a:cxn>
+              <a:cxn ang="0">
+                <a:pos x="T2" y="T3"/>
+              </a:cxn>
+              <a:cxn ang="0">
+                <a:pos x="T4" y="T5"/>
+              </a:cxn>
+              <a:cxn ang="0">
+                <a:pos x="T6" y="T7"/>
+              </a:cxn>
+              <a:cxn ang="0">
+                <a:pos x="T8" y="T9"/>
+              </a:cxn>
+              <a:cxn ang="0">
+                <a:pos x="T10" y="T11"/>
+              </a:cxn>
+              <a:cxn ang="0">
+                <a:pos x="T12" y="T13"/>
+              </a:cxn>
+              <a:cxn ang="0">
+                <a:pos x="T14" y="T15"/>
+              </a:cxn>
+              <a:cxn ang="0">
+                <a:pos x="T16" y="T17"/>
+              </a:cxn>
+              <a:cxn ang="0">
+                <a:pos x="T18" y="T19"/>
+              </a:cxn>
+              <a:cxn ang="0">
+                <a:pos x="T20" y="T21"/>
+              </a:cxn>
+              <a:cxn ang="0">
+                <a:pos x="T22" y="T23"/>
+              </a:cxn>
+              <a:cxn ang="0">
+                <a:pos x="T24" y="T25"/>
+              </a:cxn>
+              <a:cxn ang="0">
+                <a:pos x="T26" y="T27"/>
+              </a:cxn>
+              <a:cxn ang="0">
+                <a:pos x="T28" y="T29"/>
+              </a:cxn>
+              <a:cxn ang="0">
+                <a:pos x="T30" y="T31"/>
+              </a:cxn>
+              <a:cxn ang="0">
+                <a:pos x="T32" y="T33"/>
+              </a:cxn>
+              <a:cxn ang="0">
+                <a:pos x="T34" y="T35"/>
+              </a:cxn>
+              <a:cxn ang="0">
+                <a:pos x="T36" y="T37"/>
+              </a:cxn>
+              <a:cxn ang="0">
+                <a:pos x="T38" y="T39"/>
+              </a:cxn>
+              <a:cxn ang="0">
+                <a:pos x="T40" y="T41"/>
+              </a:cxn>
+            </a:cxnLst>
+            <a:rect l="0" t="0" r="r" b="b"/>
+            <a:pathLst>
+              <a:path w="7078" h="6914">
+                <a:moveTo>
+                  <a:pt x="6057" y="1966"/>
+                </a:moveTo>
+                <a:cubicBezTo>
+                  <a:pt x="5217" y="1126"/>
+                  <a:pt x="3856" y="1126"/>
+                  <a:pt x="3017" y="1966"/>
+                </a:cubicBezTo>
+                <a:cubicBezTo>
+                  <a:pt x="2323" y="2659"/>
+                  <a:pt x="2323" y="3785"/>
+                  <a:pt x="3017" y="4478"/>
+                </a:cubicBezTo>
+                <a:cubicBezTo>
+                  <a:pt x="3594" y="5055"/>
+                  <a:pt x="4530" y="5055"/>
+                  <a:pt x="5107" y="4478"/>
+                </a:cubicBezTo>
+                <a:cubicBezTo>
+                  <a:pt x="5591" y="3994"/>
+                  <a:pt x="5591" y="3209"/>
+                  <a:pt x="5107" y="2725"/>
+                </a:cubicBezTo>
+                <a:cubicBezTo>
+                  <a:pt x="4698" y="2316"/>
+                  <a:pt x="4034" y="2316"/>
+                  <a:pt x="3625" y="2725"/>
+                </a:cubicBezTo>
+                <a:cubicBezTo>
+                  <a:pt x="3514" y="2836"/>
+                  <a:pt x="3513" y="3016"/>
+                  <a:pt x="3624" y="3128"/>
+                </a:cubicBezTo>
+                <a:cubicBezTo>
+                  <a:pt x="3735" y="3239"/>
+                  <a:pt x="3916" y="3239"/>
+                  <a:pt x="4027" y="3128"/>
+                </a:cubicBezTo>
+                <a:cubicBezTo>
+                  <a:pt x="4214" y="2941"/>
+                  <a:pt x="4518" y="2941"/>
+                  <a:pt x="4705" y="3128"/>
+                </a:cubicBezTo>
+                <a:cubicBezTo>
+                  <a:pt x="4967" y="3389"/>
+                  <a:pt x="4967" y="3814"/>
+                  <a:pt x="4705" y="4076"/>
+                </a:cubicBezTo>
+                <a:cubicBezTo>
+                  <a:pt x="4350" y="4431"/>
+                  <a:pt x="3774" y="4431"/>
+                  <a:pt x="3419" y="4076"/>
+                </a:cubicBezTo>
+                <a:cubicBezTo>
+                  <a:pt x="2948" y="3604"/>
+                  <a:pt x="2948" y="2840"/>
+                  <a:pt x="3419" y="2368"/>
+                </a:cubicBezTo>
+                <a:cubicBezTo>
+                  <a:pt x="4036" y="1751"/>
+                  <a:pt x="5037" y="1751"/>
+                  <a:pt x="5655" y="2368"/>
+                </a:cubicBezTo>
+                <a:cubicBezTo>
+                  <a:pt x="6454" y="3168"/>
+                  <a:pt x="6454" y="4463"/>
+                  <a:pt x="5655" y="5263"/>
+                </a:cubicBezTo>
+                <a:cubicBezTo>
+                  <a:pt x="4628" y="6290"/>
+                  <a:pt x="2963" y="6290"/>
+                  <a:pt x="1936" y="5263"/>
+                </a:cubicBezTo>
+                <a:cubicBezTo>
+                  <a:pt x="624" y="3951"/>
+                  <a:pt x="624" y="1825"/>
+                  <a:pt x="1936" y="514"/>
+                </a:cubicBezTo>
+                <a:cubicBezTo>
+                  <a:pt x="2047" y="403"/>
+                  <a:pt x="2047" y="222"/>
+                  <a:pt x="1936" y="111"/>
+                </a:cubicBezTo>
+                <a:cubicBezTo>
+                  <a:pt x="1825" y="0"/>
+                  <a:pt x="1644" y="0"/>
+                  <a:pt x="1533" y="111"/>
+                </a:cubicBezTo>
+                <a:cubicBezTo>
+                  <a:pt x="0" y="1645"/>
+                  <a:pt x="0" y="4132"/>
+                  <a:pt x="1533" y="5665"/>
+                </a:cubicBezTo>
+                <a:cubicBezTo>
+                  <a:pt x="2782" y="6914"/>
+                  <a:pt x="4808" y="6914"/>
+                  <a:pt x="6057" y="5665"/>
+                </a:cubicBezTo>
+                <a:cubicBezTo>
+                  <a:pt x="7078" y="4644"/>
+                  <a:pt x="7078" y="2988"/>
+                  <a:pt x="6057" y="1966"/>
+                </a:cubicBezTo>
+                <a:close/>
+              </a:path>
+            </a:pathLst>
+          </a:custGeom>
+          <a:solidFill>
+            <a:srgbClr val="FF0000"/>
+          </a:solidFill>
+          <a:ln>
+            <a:noFill/>
+          </a:ln>
+        </p:spPr>
+        <p:style>
+          <a:lnRef idx="2">
+            <a:schemeClr val="accent1">
+              <a:shade val="50000"/>
+            </a:schemeClr>
+          </a:lnRef>
+          <a:fillRef idx="1">
+            <a:schemeClr val="accent1"/>
+          </a:fillRef>
+          <a:effectRef idx="0">
+            <a:schemeClr val="accent1"/>
+          </a:effectRef>
+          <a:fontRef idx="minor">
+            <a:schemeClr val="lt1"/>
+          </a:fontRef>
+        </p:style>
+        <p:txBody>
+          <a:bodyPr rtlCol="0" anchor="ctr"/>
+          <a:lstStyle/>
+          <a:p>
+            <a:pPr algn="ctr"/>
+            <a:endParaRPr lang="en-US"/>
+          </a:p>
+        </p:txBody>
+      </p:sp>
+      <p:cxnSp>
+        <p:nvCxnSpPr>
+          <p:cNvPr id="98" name="直接连接符 97">
+            <a:extLst>
+              <a:ext uri="{FF2B5EF4-FFF2-40B4-BE49-F238E27FC236}">
+                <a16:creationId xmlns:a16="http://schemas.microsoft.com/office/drawing/2014/main" id="{E67D374B-86FE-435B-4CAB-98455603F95C}"/>
+              </a:ext>
+            </a:extLst>
+          </p:cNvPr>
+          <p:cNvCxnSpPr>
+            <a:cxnSpLocks/>
+          </p:cNvCxnSpPr>
+          <p:nvPr/>
+        </p:nvCxnSpPr>
+        <p:spPr>
+          <a:xfrm>
+            <a:off x="7306757" y="2155140"/>
+            <a:ext cx="1382648" cy="0"/>
+          </a:xfrm>
+          <a:prstGeom prst="line">
+            <a:avLst/>
+          </a:prstGeom>
+          <a:ln>
+            <a:headEnd type="oval"/>
+            <a:tailEnd type="oval"/>
+          </a:ln>
+        </p:spPr>
+        <p:style>
+          <a:lnRef idx="2">
+            <a:schemeClr val="dk1"/>
+          </a:lnRef>
+          <a:fillRef idx="0">
+            <a:schemeClr val="dk1"/>
+          </a:fillRef>
+          <a:effectRef idx="1">
+            <a:schemeClr val="dk1"/>
+          </a:effectRef>
+          <a:fontRef idx="minor">
+            <a:schemeClr val="tx1"/>
+          </a:fontRef>
+        </p:style>
+      </p:cxnSp>
+      <p:sp>
+        <p:nvSpPr>
+          <p:cNvPr id="99" name="spiral_319244">
+            <a:extLst>
+              <a:ext uri="{FF2B5EF4-FFF2-40B4-BE49-F238E27FC236}">
+                <a16:creationId xmlns:a16="http://schemas.microsoft.com/office/drawing/2014/main" id="{59D2BCCF-3D59-8E7C-0FEE-602E3F1AFA87}"/>
+              </a:ext>
+            </a:extLst>
+          </p:cNvPr>
+          <p:cNvSpPr>
+            <a:spLocks noChangeAspect="1"/>
+          </p:cNvSpPr>
+          <p:nvPr/>
+        </p:nvSpPr>
+        <p:spPr>
+          <a:xfrm rot="5400000">
+            <a:off x="8534800" y="4677770"/>
+            <a:ext cx="354150" cy="345379"/>
+          </a:xfrm>
+          <a:custGeom>
+            <a:avLst/>
+            <a:gdLst>
+              <a:gd name="T0" fmla="*/ 6057 w 7078"/>
+              <a:gd name="T1" fmla="*/ 1966 h 6914"/>
+              <a:gd name="T2" fmla="*/ 3017 w 7078"/>
+              <a:gd name="T3" fmla="*/ 1966 h 6914"/>
+              <a:gd name="T4" fmla="*/ 3017 w 7078"/>
+              <a:gd name="T5" fmla="*/ 4478 h 6914"/>
+              <a:gd name="T6" fmla="*/ 5107 w 7078"/>
+              <a:gd name="T7" fmla="*/ 4478 h 6914"/>
+              <a:gd name="T8" fmla="*/ 5107 w 7078"/>
+              <a:gd name="T9" fmla="*/ 2725 h 6914"/>
+              <a:gd name="T10" fmla="*/ 3625 w 7078"/>
+              <a:gd name="T11" fmla="*/ 2725 h 6914"/>
+              <a:gd name="T12" fmla="*/ 3624 w 7078"/>
+              <a:gd name="T13" fmla="*/ 3128 h 6914"/>
+              <a:gd name="T14" fmla="*/ 4027 w 7078"/>
+              <a:gd name="T15" fmla="*/ 3128 h 6914"/>
+              <a:gd name="T16" fmla="*/ 4705 w 7078"/>
+              <a:gd name="T17" fmla="*/ 3128 h 6914"/>
+              <a:gd name="T18" fmla="*/ 4705 w 7078"/>
+              <a:gd name="T19" fmla="*/ 4076 h 6914"/>
+              <a:gd name="T20" fmla="*/ 3419 w 7078"/>
+              <a:gd name="T21" fmla="*/ 4076 h 6914"/>
+              <a:gd name="T22" fmla="*/ 3419 w 7078"/>
+              <a:gd name="T23" fmla="*/ 2368 h 6914"/>
+              <a:gd name="T24" fmla="*/ 5655 w 7078"/>
+              <a:gd name="T25" fmla="*/ 2368 h 6914"/>
+              <a:gd name="T26" fmla="*/ 5655 w 7078"/>
+              <a:gd name="T27" fmla="*/ 5263 h 6914"/>
+              <a:gd name="T28" fmla="*/ 1936 w 7078"/>
+              <a:gd name="T29" fmla="*/ 5263 h 6914"/>
+              <a:gd name="T30" fmla="*/ 1936 w 7078"/>
+              <a:gd name="T31" fmla="*/ 514 h 6914"/>
+              <a:gd name="T32" fmla="*/ 1936 w 7078"/>
+              <a:gd name="T33" fmla="*/ 111 h 6914"/>
+              <a:gd name="T34" fmla="*/ 1533 w 7078"/>
+              <a:gd name="T35" fmla="*/ 111 h 6914"/>
+              <a:gd name="T36" fmla="*/ 1533 w 7078"/>
+              <a:gd name="T37" fmla="*/ 5665 h 6914"/>
+              <a:gd name="T38" fmla="*/ 6057 w 7078"/>
+              <a:gd name="T39" fmla="*/ 5665 h 6914"/>
+              <a:gd name="T40" fmla="*/ 6057 w 7078"/>
+              <a:gd name="T41" fmla="*/ 1966 h 6914"/>
+            </a:gdLst>
+            <a:ahLst/>
+            <a:cxnLst>
+              <a:cxn ang="0">
+                <a:pos x="T0" y="T1"/>
+              </a:cxn>
+              <a:cxn ang="0">
+                <a:pos x="T2" y="T3"/>
+              </a:cxn>
+              <a:cxn ang="0">
+                <a:pos x="T4" y="T5"/>
+              </a:cxn>
+              <a:cxn ang="0">
+                <a:pos x="T6" y="T7"/>
+              </a:cxn>
+              <a:cxn ang="0">
+                <a:pos x="T8" y="T9"/>
+              </a:cxn>
+              <a:cxn ang="0">
+                <a:pos x="T10" y="T11"/>
+              </a:cxn>
+              <a:cxn ang="0">
+                <a:pos x="T12" y="T13"/>
+              </a:cxn>
+              <a:cxn ang="0">
+                <a:pos x="T14" y="T15"/>
+              </a:cxn>
+              <a:cxn ang="0">
+                <a:pos x="T16" y="T17"/>
+              </a:cxn>
+              <a:cxn ang="0">
+                <a:pos x="T18" y="T19"/>
+              </a:cxn>
+              <a:cxn ang="0">
+                <a:pos x="T20" y="T21"/>
+              </a:cxn>
+              <a:cxn ang="0">
+                <a:pos x="T22" y="T23"/>
+              </a:cxn>
+              <a:cxn ang="0">
+                <a:pos x="T24" y="T25"/>
+              </a:cxn>
+              <a:cxn ang="0">
+                <a:pos x="T26" y="T27"/>
+              </a:cxn>
+              <a:cxn ang="0">
+                <a:pos x="T28" y="T29"/>
+              </a:cxn>
+              <a:cxn ang="0">
+                <a:pos x="T30" y="T31"/>
+              </a:cxn>
+              <a:cxn ang="0">
+                <a:pos x="T32" y="T33"/>
+              </a:cxn>
+              <a:cxn ang="0">
+                <a:pos x="T34" y="T35"/>
+              </a:cxn>
+              <a:cxn ang="0">
+                <a:pos x="T36" y="T37"/>
+              </a:cxn>
+              <a:cxn ang="0">
+                <a:pos x="T38" y="T39"/>
+              </a:cxn>
+              <a:cxn ang="0">
+                <a:pos x="T40" y="T41"/>
+              </a:cxn>
+            </a:cxnLst>
+            <a:rect l="0" t="0" r="r" b="b"/>
+            <a:pathLst>
+              <a:path w="7078" h="6914">
+                <a:moveTo>
+                  <a:pt x="6057" y="1966"/>
+                </a:moveTo>
+                <a:cubicBezTo>
+                  <a:pt x="5217" y="1126"/>
+                  <a:pt x="3856" y="1126"/>
+                  <a:pt x="3017" y="1966"/>
+                </a:cubicBezTo>
+                <a:cubicBezTo>
+                  <a:pt x="2323" y="2659"/>
+                  <a:pt x="2323" y="3785"/>
+                  <a:pt x="3017" y="4478"/>
+                </a:cubicBezTo>
+                <a:cubicBezTo>
+                  <a:pt x="3594" y="5055"/>
+                  <a:pt x="4530" y="5055"/>
+                  <a:pt x="5107" y="4478"/>
+                </a:cubicBezTo>
+                <a:cubicBezTo>
+                  <a:pt x="5591" y="3994"/>
+                  <a:pt x="5591" y="3209"/>
+                  <a:pt x="5107" y="2725"/>
+                </a:cubicBezTo>
+                <a:cubicBezTo>
+                  <a:pt x="4698" y="2316"/>
+                  <a:pt x="4034" y="2316"/>
+                  <a:pt x="3625" y="2725"/>
+                </a:cubicBezTo>
+                <a:cubicBezTo>
+                  <a:pt x="3514" y="2836"/>
+                  <a:pt x="3513" y="3016"/>
+                  <a:pt x="3624" y="3128"/>
+                </a:cubicBezTo>
+                <a:cubicBezTo>
+                  <a:pt x="3735" y="3239"/>
+                  <a:pt x="3916" y="3239"/>
+                  <a:pt x="4027" y="3128"/>
+                </a:cubicBezTo>
+                <a:cubicBezTo>
+                  <a:pt x="4214" y="2941"/>
+                  <a:pt x="4518" y="2941"/>
+                  <a:pt x="4705" y="3128"/>
+                </a:cubicBezTo>
+                <a:cubicBezTo>
+                  <a:pt x="4967" y="3389"/>
+                  <a:pt x="4967" y="3814"/>
+                  <a:pt x="4705" y="4076"/>
+                </a:cubicBezTo>
+                <a:cubicBezTo>
+                  <a:pt x="4350" y="4431"/>
+                  <a:pt x="3774" y="4431"/>
+                  <a:pt x="3419" y="4076"/>
+                </a:cubicBezTo>
+                <a:cubicBezTo>
+                  <a:pt x="2948" y="3604"/>
+                  <a:pt x="2948" y="2840"/>
+                  <a:pt x="3419" y="2368"/>
+                </a:cubicBezTo>
+                <a:cubicBezTo>
+                  <a:pt x="4036" y="1751"/>
+                  <a:pt x="5037" y="1751"/>
+                  <a:pt x="5655" y="2368"/>
+                </a:cubicBezTo>
+                <a:cubicBezTo>
+                  <a:pt x="6454" y="3168"/>
+                  <a:pt x="6454" y="4463"/>
+                  <a:pt x="5655" y="5263"/>
+                </a:cubicBezTo>
+                <a:cubicBezTo>
+                  <a:pt x="4628" y="6290"/>
+                  <a:pt x="2963" y="6290"/>
+                  <a:pt x="1936" y="5263"/>
+                </a:cubicBezTo>
+                <a:cubicBezTo>
+                  <a:pt x="624" y="3951"/>
+                  <a:pt x="624" y="1825"/>
+                  <a:pt x="1936" y="514"/>
+                </a:cubicBezTo>
+                <a:cubicBezTo>
+                  <a:pt x="2047" y="403"/>
+                  <a:pt x="2047" y="222"/>
+                  <a:pt x="1936" y="111"/>
+                </a:cubicBezTo>
+                <a:cubicBezTo>
+                  <a:pt x="1825" y="0"/>
+                  <a:pt x="1644" y="0"/>
+                  <a:pt x="1533" y="111"/>
+                </a:cubicBezTo>
+                <a:cubicBezTo>
+                  <a:pt x="0" y="1645"/>
+                  <a:pt x="0" y="4132"/>
+                  <a:pt x="1533" y="5665"/>
+                </a:cubicBezTo>
+                <a:cubicBezTo>
+                  <a:pt x="2782" y="6914"/>
+                  <a:pt x="4808" y="6914"/>
+                  <a:pt x="6057" y="5665"/>
+                </a:cubicBezTo>
+                <a:cubicBezTo>
+                  <a:pt x="7078" y="4644"/>
+                  <a:pt x="7078" y="2988"/>
+                  <a:pt x="6057" y="1966"/>
+                </a:cubicBezTo>
+                <a:close/>
+              </a:path>
+            </a:pathLst>
+          </a:custGeom>
+          <a:solidFill>
+            <a:srgbClr val="FF0000"/>
+          </a:solidFill>
+          <a:ln>
+            <a:noFill/>
+          </a:ln>
+        </p:spPr>
+        <p:style>
+          <a:lnRef idx="2">
+            <a:schemeClr val="accent1">
+              <a:shade val="50000"/>
+            </a:schemeClr>
+          </a:lnRef>
+          <a:fillRef idx="1">
+            <a:schemeClr val="accent1"/>
+          </a:fillRef>
+          <a:effectRef idx="0">
+            <a:schemeClr val="accent1"/>
+          </a:effectRef>
+          <a:fontRef idx="minor">
+            <a:schemeClr val="lt1"/>
+          </a:fontRef>
+        </p:style>
+        <p:txBody>
+          <a:bodyPr rtlCol="0" anchor="ctr"/>
+          <a:lstStyle/>
+          <a:p>
+            <a:pPr algn="ctr"/>
+            <a:endParaRPr lang="en-US"/>
+          </a:p>
+        </p:txBody>
+      </p:sp>
+      <p:cxnSp>
+        <p:nvCxnSpPr>
+          <p:cNvPr id="100" name="直接连接符 99">
+            <a:extLst>
+              <a:ext uri="{FF2B5EF4-FFF2-40B4-BE49-F238E27FC236}">
+                <a16:creationId xmlns:a16="http://schemas.microsoft.com/office/drawing/2014/main" id="{3B89D789-CAD5-F8C8-D659-0890EB4DF8F5}"/>
+              </a:ext>
+            </a:extLst>
+          </p:cNvPr>
+          <p:cNvCxnSpPr>
+            <a:cxnSpLocks/>
+          </p:cNvCxnSpPr>
+          <p:nvPr/>
+        </p:nvCxnSpPr>
+        <p:spPr>
+          <a:xfrm>
+            <a:off x="8684895" y="4610100"/>
+            <a:ext cx="1331724" cy="0"/>
+          </a:xfrm>
+          <a:prstGeom prst="line">
+            <a:avLst/>
+          </a:prstGeom>
+          <a:ln>
+            <a:headEnd type="none"/>
+            <a:tailEnd type="none"/>
+          </a:ln>
+        </p:spPr>
+        <p:style>
+          <a:lnRef idx="2">
+            <a:schemeClr val="dk1"/>
+          </a:lnRef>
+          <a:fillRef idx="0">
+            <a:schemeClr val="dk1"/>
+          </a:fillRef>
+          <a:effectRef idx="1">
+            <a:schemeClr val="dk1"/>
+          </a:effectRef>
+          <a:fontRef idx="minor">
+            <a:schemeClr val="tx1"/>
+          </a:fontRef>
+        </p:style>
+      </p:cxnSp>
+      <p:sp>
+        <p:nvSpPr>
+          <p:cNvPr id="105" name="椭圆 104">
+            <a:extLst>
+              <a:ext uri="{FF2B5EF4-FFF2-40B4-BE49-F238E27FC236}">
+                <a16:creationId xmlns:a16="http://schemas.microsoft.com/office/drawing/2014/main" id="{3D19F124-3949-F405-2C2A-20F54D0775FE}"/>
+              </a:ext>
+            </a:extLst>
+          </p:cNvPr>
+          <p:cNvSpPr/>
+          <p:nvPr/>
+        </p:nvSpPr>
+        <p:spPr>
+          <a:xfrm>
+            <a:off x="7201321" y="2047140"/>
+            <a:ext cx="216000" cy="216000"/>
+          </a:xfrm>
+          <a:prstGeom prst="ellipse">
+            <a:avLst/>
+          </a:prstGeom>
+          <a:solidFill>
+            <a:schemeClr val="bg1"/>
+          </a:solidFill>
+          <a:ln>
+            <a:solidFill>
+              <a:schemeClr val="tx1"/>
+            </a:solidFill>
+          </a:ln>
+        </p:spPr>
+        <p:style>
+          <a:lnRef idx="2">
+            <a:schemeClr val="accent1">
+              <a:shade val="15000"/>
+            </a:schemeClr>
+          </a:lnRef>
+          <a:fillRef idx="1">
+            <a:schemeClr val="accent1"/>
+          </a:fillRef>
+          <a:effectRef idx="0">
+            <a:schemeClr val="accent1"/>
+          </a:effectRef>
+          <a:fontRef idx="minor">
+            <a:schemeClr val="lt1"/>
+          </a:fontRef>
+        </p:style>
+        <p:txBody>
+          <a:bodyPr rtlCol="0" anchor="ctr"/>
+          <a:lstStyle/>
+          <a:p>
+            <a:pPr algn="ctr"/>
+            <a:endParaRPr lang="zh-CN" altLang="en-US"/>
+          </a:p>
+        </p:txBody>
+      </p:sp>
+      <p:sp>
+        <p:nvSpPr>
+          <p:cNvPr id="106" name="椭圆 105">
+            <a:extLst>
+              <a:ext uri="{FF2B5EF4-FFF2-40B4-BE49-F238E27FC236}">
+                <a16:creationId xmlns:a16="http://schemas.microsoft.com/office/drawing/2014/main" id="{8D0A102A-BA52-3357-051E-BE946D8B3E7E}"/>
+              </a:ext>
+            </a:extLst>
+          </p:cNvPr>
+          <p:cNvSpPr/>
+          <p:nvPr/>
+        </p:nvSpPr>
+        <p:spPr>
+          <a:xfrm>
+            <a:off x="9898730" y="4502100"/>
+            <a:ext cx="216000" cy="216000"/>
+          </a:xfrm>
+          <a:prstGeom prst="ellipse">
+            <a:avLst/>
+          </a:prstGeom>
+          <a:solidFill>
+            <a:schemeClr val="bg1"/>
+          </a:solidFill>
+          <a:ln>
+            <a:solidFill>
+              <a:schemeClr val="tx1"/>
+            </a:solidFill>
+          </a:ln>
+        </p:spPr>
+        <p:style>
+          <a:lnRef idx="2">
+            <a:schemeClr val="accent1">
+              <a:shade val="15000"/>
+            </a:schemeClr>
+          </a:lnRef>
+          <a:fillRef idx="1">
+            <a:schemeClr val="accent1"/>
+          </a:fillRef>
+          <a:effectRef idx="0">
+            <a:schemeClr val="accent1"/>
+          </a:effectRef>
+          <a:fontRef idx="minor">
+            <a:schemeClr val="lt1"/>
+          </a:fontRef>
+        </p:style>
+        <p:txBody>
+          <a:bodyPr rtlCol="0" anchor="ctr"/>
+          <a:lstStyle/>
+          <a:p>
+            <a:pPr algn="ctr"/>
+            <a:endParaRPr lang="zh-CN" altLang="en-US"/>
+          </a:p>
+        </p:txBody>
+      </p:sp>
+      <p:sp>
+        <p:nvSpPr>
+          <p:cNvPr id="107" name="spiral_319244">
+            <a:extLst>
+              <a:ext uri="{FF2B5EF4-FFF2-40B4-BE49-F238E27FC236}">
+                <a16:creationId xmlns:a16="http://schemas.microsoft.com/office/drawing/2014/main" id="{667C5568-5725-EAA7-8E01-C913D6CEF0BB}"/>
+              </a:ext>
+            </a:extLst>
+          </p:cNvPr>
+          <p:cNvSpPr>
+            <a:spLocks noChangeAspect="1"/>
+          </p:cNvSpPr>
+          <p:nvPr/>
+        </p:nvSpPr>
+        <p:spPr>
+          <a:xfrm rot="5400000">
+            <a:off x="10026818" y="3224368"/>
+            <a:ext cx="354150" cy="345379"/>
+          </a:xfrm>
+          <a:custGeom>
+            <a:avLst/>
+            <a:gdLst>
+              <a:gd name="T0" fmla="*/ 6057 w 7078"/>
+              <a:gd name="T1" fmla="*/ 1966 h 6914"/>
+              <a:gd name="T2" fmla="*/ 3017 w 7078"/>
+              <a:gd name="T3" fmla="*/ 1966 h 6914"/>
+              <a:gd name="T4" fmla="*/ 3017 w 7078"/>
+              <a:gd name="T5" fmla="*/ 4478 h 6914"/>
+              <a:gd name="T6" fmla="*/ 5107 w 7078"/>
+              <a:gd name="T7" fmla="*/ 4478 h 6914"/>
+              <a:gd name="T8" fmla="*/ 5107 w 7078"/>
+              <a:gd name="T9" fmla="*/ 2725 h 6914"/>
+              <a:gd name="T10" fmla="*/ 3625 w 7078"/>
+              <a:gd name="T11" fmla="*/ 2725 h 6914"/>
+              <a:gd name="T12" fmla="*/ 3624 w 7078"/>
+              <a:gd name="T13" fmla="*/ 3128 h 6914"/>
+              <a:gd name="T14" fmla="*/ 4027 w 7078"/>
+              <a:gd name="T15" fmla="*/ 3128 h 6914"/>
+              <a:gd name="T16" fmla="*/ 4705 w 7078"/>
+              <a:gd name="T17" fmla="*/ 3128 h 6914"/>
+              <a:gd name="T18" fmla="*/ 4705 w 7078"/>
+              <a:gd name="T19" fmla="*/ 4076 h 6914"/>
+              <a:gd name="T20" fmla="*/ 3419 w 7078"/>
+              <a:gd name="T21" fmla="*/ 4076 h 6914"/>
+              <a:gd name="T22" fmla="*/ 3419 w 7078"/>
+              <a:gd name="T23" fmla="*/ 2368 h 6914"/>
+              <a:gd name="T24" fmla="*/ 5655 w 7078"/>
+              <a:gd name="T25" fmla="*/ 2368 h 6914"/>
+              <a:gd name="T26" fmla="*/ 5655 w 7078"/>
+              <a:gd name="T27" fmla="*/ 5263 h 6914"/>
+              <a:gd name="T28" fmla="*/ 1936 w 7078"/>
+              <a:gd name="T29" fmla="*/ 5263 h 6914"/>
+              <a:gd name="T30" fmla="*/ 1936 w 7078"/>
+              <a:gd name="T31" fmla="*/ 514 h 6914"/>
+              <a:gd name="T32" fmla="*/ 1936 w 7078"/>
+              <a:gd name="T33" fmla="*/ 111 h 6914"/>
+              <a:gd name="T34" fmla="*/ 1533 w 7078"/>
+              <a:gd name="T35" fmla="*/ 111 h 6914"/>
+              <a:gd name="T36" fmla="*/ 1533 w 7078"/>
+              <a:gd name="T37" fmla="*/ 5665 h 6914"/>
+              <a:gd name="T38" fmla="*/ 6057 w 7078"/>
+              <a:gd name="T39" fmla="*/ 5665 h 6914"/>
+              <a:gd name="T40" fmla="*/ 6057 w 7078"/>
+              <a:gd name="T41" fmla="*/ 1966 h 6914"/>
+            </a:gdLst>
+            <a:ahLst/>
+            <a:cxnLst>
+              <a:cxn ang="0">
+                <a:pos x="T0" y="T1"/>
+              </a:cxn>
+              <a:cxn ang="0">
+                <a:pos x="T2" y="T3"/>
+              </a:cxn>
+              <a:cxn ang="0">
+                <a:pos x="T4" y="T5"/>
+              </a:cxn>
+              <a:cxn ang="0">
+                <a:pos x="T6" y="T7"/>
+              </a:cxn>
+              <a:cxn ang="0">
+                <a:pos x="T8" y="T9"/>
+              </a:cxn>
+              <a:cxn ang="0">
+                <a:pos x="T10" y="T11"/>
+              </a:cxn>
+              <a:cxn ang="0">
+                <a:pos x="T12" y="T13"/>
+              </a:cxn>
+              <a:cxn ang="0">
+                <a:pos x="T14" y="T15"/>
+              </a:cxn>
+              <a:cxn ang="0">
+                <a:pos x="T16" y="T17"/>
+              </a:cxn>
+              <a:cxn ang="0">
+                <a:pos x="T18" y="T19"/>
+              </a:cxn>
+              <a:cxn ang="0">
+                <a:pos x="T20" y="T21"/>
+              </a:cxn>
+              <a:cxn ang="0">
+                <a:pos x="T22" y="T23"/>
+              </a:cxn>
+              <a:cxn ang="0">
+                <a:pos x="T24" y="T25"/>
+              </a:cxn>
+              <a:cxn ang="0">
+                <a:pos x="T26" y="T27"/>
+              </a:cxn>
+              <a:cxn ang="0">
+                <a:pos x="T28" y="T29"/>
+              </a:cxn>
+              <a:cxn ang="0">
+                <a:pos x="T30" y="T31"/>
+              </a:cxn>
+              <a:cxn ang="0">
+                <a:pos x="T32" y="T33"/>
+              </a:cxn>
+              <a:cxn ang="0">
+                <a:pos x="T34" y="T35"/>
+              </a:cxn>
+              <a:cxn ang="0">
+                <a:pos x="T36" y="T37"/>
+              </a:cxn>
+              <a:cxn ang="0">
+                <a:pos x="T38" y="T39"/>
+              </a:cxn>
+              <a:cxn ang="0">
+                <a:pos x="T40" y="T41"/>
+              </a:cxn>
+            </a:cxnLst>
+            <a:rect l="0" t="0" r="r" b="b"/>
+            <a:pathLst>
+              <a:path w="7078" h="6914">
+                <a:moveTo>
+                  <a:pt x="6057" y="1966"/>
+                </a:moveTo>
+                <a:cubicBezTo>
+                  <a:pt x="5217" y="1126"/>
+                  <a:pt x="3856" y="1126"/>
+                  <a:pt x="3017" y="1966"/>
+                </a:cubicBezTo>
+                <a:cubicBezTo>
+                  <a:pt x="2323" y="2659"/>
+                  <a:pt x="2323" y="3785"/>
+                  <a:pt x="3017" y="4478"/>
+                </a:cubicBezTo>
+                <a:cubicBezTo>
+                  <a:pt x="3594" y="5055"/>
+                  <a:pt x="4530" y="5055"/>
+                  <a:pt x="5107" y="4478"/>
+                </a:cubicBezTo>
+                <a:cubicBezTo>
+                  <a:pt x="5591" y="3994"/>
+                  <a:pt x="5591" y="3209"/>
+                  <a:pt x="5107" y="2725"/>
+                </a:cubicBezTo>
+                <a:cubicBezTo>
+                  <a:pt x="4698" y="2316"/>
+                  <a:pt x="4034" y="2316"/>
+                  <a:pt x="3625" y="2725"/>
+                </a:cubicBezTo>
+                <a:cubicBezTo>
+                  <a:pt x="3514" y="2836"/>
+                  <a:pt x="3513" y="3016"/>
+                  <a:pt x="3624" y="3128"/>
+                </a:cubicBezTo>
+                <a:cubicBezTo>
+                  <a:pt x="3735" y="3239"/>
+                  <a:pt x="3916" y="3239"/>
+                  <a:pt x="4027" y="3128"/>
+                </a:cubicBezTo>
+                <a:cubicBezTo>
+                  <a:pt x="4214" y="2941"/>
+                  <a:pt x="4518" y="2941"/>
+                  <a:pt x="4705" y="3128"/>
+                </a:cubicBezTo>
+                <a:cubicBezTo>
+                  <a:pt x="4967" y="3389"/>
+                  <a:pt x="4967" y="3814"/>
+                  <a:pt x="4705" y="4076"/>
+                </a:cubicBezTo>
+                <a:cubicBezTo>
+                  <a:pt x="4350" y="4431"/>
+                  <a:pt x="3774" y="4431"/>
+                  <a:pt x="3419" y="4076"/>
+                </a:cubicBezTo>
+                <a:cubicBezTo>
+                  <a:pt x="2948" y="3604"/>
+                  <a:pt x="2948" y="2840"/>
+                  <a:pt x="3419" y="2368"/>
+                </a:cubicBezTo>
+                <a:cubicBezTo>
+                  <a:pt x="4036" y="1751"/>
+                  <a:pt x="5037" y="1751"/>
+                  <a:pt x="5655" y="2368"/>
+                </a:cubicBezTo>
+                <a:cubicBezTo>
+                  <a:pt x="6454" y="3168"/>
+                  <a:pt x="6454" y="4463"/>
+                  <a:pt x="5655" y="5263"/>
+                </a:cubicBezTo>
+                <a:cubicBezTo>
+                  <a:pt x="4628" y="6290"/>
+                  <a:pt x="2963" y="6290"/>
+                  <a:pt x="1936" y="5263"/>
+                </a:cubicBezTo>
+                <a:cubicBezTo>
+                  <a:pt x="624" y="3951"/>
+                  <a:pt x="624" y="1825"/>
+                  <a:pt x="1936" y="514"/>
+                </a:cubicBezTo>
+                <a:cubicBezTo>
+                  <a:pt x="2047" y="403"/>
+                  <a:pt x="2047" y="222"/>
+                  <a:pt x="1936" y="111"/>
+                </a:cubicBezTo>
+                <a:cubicBezTo>
+                  <a:pt x="1825" y="0"/>
+                  <a:pt x="1644" y="0"/>
+                  <a:pt x="1533" y="111"/>
+                </a:cubicBezTo>
+                <a:cubicBezTo>
+                  <a:pt x="0" y="1645"/>
+                  <a:pt x="0" y="4132"/>
+                  <a:pt x="1533" y="5665"/>
+                </a:cubicBezTo>
+                <a:cubicBezTo>
+                  <a:pt x="2782" y="6914"/>
+                  <a:pt x="4808" y="6914"/>
+                  <a:pt x="6057" y="5665"/>
+                </a:cubicBezTo>
+                <a:cubicBezTo>
+                  <a:pt x="7078" y="4644"/>
+                  <a:pt x="7078" y="2988"/>
+                  <a:pt x="6057" y="1966"/>
+                </a:cubicBezTo>
+                <a:close/>
+              </a:path>
+            </a:pathLst>
+          </a:custGeom>
+          <a:solidFill>
+            <a:srgbClr val="FF0000"/>
+          </a:solidFill>
+          <a:ln>
+            <a:noFill/>
+          </a:ln>
+        </p:spPr>
+        <p:style>
+          <a:lnRef idx="2">
+            <a:schemeClr val="accent1">
+              <a:shade val="50000"/>
+            </a:schemeClr>
+          </a:lnRef>
+          <a:fillRef idx="1">
+            <a:schemeClr val="accent1"/>
+          </a:fillRef>
+          <a:effectRef idx="0">
+            <a:schemeClr val="accent1"/>
+          </a:effectRef>
+          <a:fontRef idx="minor">
+            <a:schemeClr val="lt1"/>
+          </a:fontRef>
+        </p:style>
+        <p:txBody>
+          <a:bodyPr rtlCol="0" anchor="ctr"/>
+          <a:lstStyle/>
+          <a:p>
+            <a:pPr algn="ctr"/>
+            <a:endParaRPr lang="en-US"/>
+          </a:p>
+        </p:txBody>
+      </p:sp>
+      <p:sp>
+        <p:nvSpPr>
+          <p:cNvPr id="108" name="spiral_319244">
+            <a:extLst>
+              <a:ext uri="{FF2B5EF4-FFF2-40B4-BE49-F238E27FC236}">
+                <a16:creationId xmlns:a16="http://schemas.microsoft.com/office/drawing/2014/main" id="{C8E2FD87-7421-B4ED-0D37-85A5422360E1}"/>
+              </a:ext>
+            </a:extLst>
+          </p:cNvPr>
+          <p:cNvSpPr>
+            <a:spLocks noChangeAspect="1"/>
+          </p:cNvSpPr>
+          <p:nvPr/>
+        </p:nvSpPr>
+        <p:spPr>
+          <a:xfrm rot="5400000">
+            <a:off x="6949010" y="3224368"/>
+            <a:ext cx="354150" cy="345379"/>
+          </a:xfrm>
+          <a:custGeom>
+            <a:avLst/>
+            <a:gdLst>
+              <a:gd name="T0" fmla="*/ 6057 w 7078"/>
+              <a:gd name="T1" fmla="*/ 1966 h 6914"/>
+              <a:gd name="T2" fmla="*/ 3017 w 7078"/>
+              <a:gd name="T3" fmla="*/ 1966 h 6914"/>
+              <a:gd name="T4" fmla="*/ 3017 w 7078"/>
+              <a:gd name="T5" fmla="*/ 4478 h 6914"/>
+              <a:gd name="T6" fmla="*/ 5107 w 7078"/>
+              <a:gd name="T7" fmla="*/ 4478 h 6914"/>
+              <a:gd name="T8" fmla="*/ 5107 w 7078"/>
+              <a:gd name="T9" fmla="*/ 2725 h 6914"/>
+              <a:gd name="T10" fmla="*/ 3625 w 7078"/>
+              <a:gd name="T11" fmla="*/ 2725 h 6914"/>
+              <a:gd name="T12" fmla="*/ 3624 w 7078"/>
+              <a:gd name="T13" fmla="*/ 3128 h 6914"/>
+              <a:gd name="T14" fmla="*/ 4027 w 7078"/>
+              <a:gd name="T15" fmla="*/ 3128 h 6914"/>
+              <a:gd name="T16" fmla="*/ 4705 w 7078"/>
+              <a:gd name="T17" fmla="*/ 3128 h 6914"/>
+              <a:gd name="T18" fmla="*/ 4705 w 7078"/>
+              <a:gd name="T19" fmla="*/ 4076 h 6914"/>
+              <a:gd name="T20" fmla="*/ 3419 w 7078"/>
+              <a:gd name="T21" fmla="*/ 4076 h 6914"/>
+              <a:gd name="T22" fmla="*/ 3419 w 7078"/>
+              <a:gd name="T23" fmla="*/ 2368 h 6914"/>
+              <a:gd name="T24" fmla="*/ 5655 w 7078"/>
+              <a:gd name="T25" fmla="*/ 2368 h 6914"/>
+              <a:gd name="T26" fmla="*/ 5655 w 7078"/>
+              <a:gd name="T27" fmla="*/ 5263 h 6914"/>
+              <a:gd name="T28" fmla="*/ 1936 w 7078"/>
+              <a:gd name="T29" fmla="*/ 5263 h 6914"/>
+              <a:gd name="T30" fmla="*/ 1936 w 7078"/>
+              <a:gd name="T31" fmla="*/ 514 h 6914"/>
+              <a:gd name="T32" fmla="*/ 1936 w 7078"/>
+              <a:gd name="T33" fmla="*/ 111 h 6914"/>
+              <a:gd name="T34" fmla="*/ 1533 w 7078"/>
+              <a:gd name="T35" fmla="*/ 111 h 6914"/>
+              <a:gd name="T36" fmla="*/ 1533 w 7078"/>
+              <a:gd name="T37" fmla="*/ 5665 h 6914"/>
+              <a:gd name="T38" fmla="*/ 6057 w 7078"/>
+              <a:gd name="T39" fmla="*/ 5665 h 6914"/>
+              <a:gd name="T40" fmla="*/ 6057 w 7078"/>
+              <a:gd name="T41" fmla="*/ 1966 h 6914"/>
+            </a:gdLst>
+            <a:ahLst/>
+            <a:cxnLst>
+              <a:cxn ang="0">
+                <a:pos x="T0" y="T1"/>
+              </a:cxn>
+              <a:cxn ang="0">
+                <a:pos x="T2" y="T3"/>
+              </a:cxn>
+              <a:cxn ang="0">
+                <a:pos x="T4" y="T5"/>
+              </a:cxn>
+              <a:cxn ang="0">
+                <a:pos x="T6" y="T7"/>
+              </a:cxn>
+              <a:cxn ang="0">
+                <a:pos x="T8" y="T9"/>
+              </a:cxn>
+              <a:cxn ang="0">
+                <a:pos x="T10" y="T11"/>
+              </a:cxn>
+              <a:cxn ang="0">
+                <a:pos x="T12" y="T13"/>
+              </a:cxn>
+              <a:cxn ang="0">
+                <a:pos x="T14" y="T15"/>
+              </a:cxn>
+              <a:cxn ang="0">
+                <a:pos x="T16" y="T17"/>
+              </a:cxn>
+              <a:cxn ang="0">
+                <a:pos x="T18" y="T19"/>
+              </a:cxn>
+              <a:cxn ang="0">
+                <a:pos x="T20" y="T21"/>
+              </a:cxn>
+              <a:cxn ang="0">
+                <a:pos x="T22" y="T23"/>
+              </a:cxn>
+              <a:cxn ang="0">
+                <a:pos x="T24" y="T25"/>
+              </a:cxn>
+              <a:cxn ang="0">
+                <a:pos x="T26" y="T27"/>
+              </a:cxn>
+              <a:cxn ang="0">
+                <a:pos x="T28" y="T29"/>
+              </a:cxn>
+              <a:cxn ang="0">
+                <a:pos x="T30" y="T31"/>
+              </a:cxn>
+              <a:cxn ang="0">
+                <a:pos x="T32" y="T33"/>
+              </a:cxn>
+              <a:cxn ang="0">
+                <a:pos x="T34" y="T35"/>
+              </a:cxn>
+              <a:cxn ang="0">
+                <a:pos x="T36" y="T37"/>
+              </a:cxn>
+              <a:cxn ang="0">
+                <a:pos x="T38" y="T39"/>
+              </a:cxn>
+              <a:cxn ang="0">
+                <a:pos x="T40" y="T41"/>
+              </a:cxn>
+            </a:cxnLst>
+            <a:rect l="0" t="0" r="r" b="b"/>
+            <a:pathLst>
+              <a:path w="7078" h="6914">
+                <a:moveTo>
+                  <a:pt x="6057" y="1966"/>
+                </a:moveTo>
+                <a:cubicBezTo>
+                  <a:pt x="5217" y="1126"/>
+                  <a:pt x="3856" y="1126"/>
+                  <a:pt x="3017" y="1966"/>
+                </a:cubicBezTo>
+                <a:cubicBezTo>
+                  <a:pt x="2323" y="2659"/>
+                  <a:pt x="2323" y="3785"/>
+                  <a:pt x="3017" y="4478"/>
+                </a:cubicBezTo>
+                <a:cubicBezTo>
+                  <a:pt x="3594" y="5055"/>
+                  <a:pt x="4530" y="5055"/>
+                  <a:pt x="5107" y="4478"/>
+                </a:cubicBezTo>
+                <a:cubicBezTo>
+                  <a:pt x="5591" y="3994"/>
+                  <a:pt x="5591" y="3209"/>
+                  <a:pt x="5107" y="2725"/>
+                </a:cubicBezTo>
+                <a:cubicBezTo>
+                  <a:pt x="4698" y="2316"/>
+                  <a:pt x="4034" y="2316"/>
+                  <a:pt x="3625" y="2725"/>
+                </a:cubicBezTo>
+                <a:cubicBezTo>
+                  <a:pt x="3514" y="2836"/>
+                  <a:pt x="3513" y="3016"/>
+                  <a:pt x="3624" y="3128"/>
+                </a:cubicBezTo>
+                <a:cubicBezTo>
+                  <a:pt x="3735" y="3239"/>
+                  <a:pt x="3916" y="3239"/>
+                  <a:pt x="4027" y="3128"/>
+                </a:cubicBezTo>
+                <a:cubicBezTo>
+                  <a:pt x="4214" y="2941"/>
+                  <a:pt x="4518" y="2941"/>
+                  <a:pt x="4705" y="3128"/>
+                </a:cubicBezTo>
+                <a:cubicBezTo>
+                  <a:pt x="4967" y="3389"/>
+                  <a:pt x="4967" y="3814"/>
+                  <a:pt x="4705" y="4076"/>
+                </a:cubicBezTo>
+                <a:cubicBezTo>
+                  <a:pt x="4350" y="4431"/>
+                  <a:pt x="3774" y="4431"/>
+                  <a:pt x="3419" y="4076"/>
+                </a:cubicBezTo>
+                <a:cubicBezTo>
+                  <a:pt x="2948" y="3604"/>
+                  <a:pt x="2948" y="2840"/>
+                  <a:pt x="3419" y="2368"/>
+                </a:cubicBezTo>
+                <a:cubicBezTo>
+                  <a:pt x="4036" y="1751"/>
+                  <a:pt x="5037" y="1751"/>
+                  <a:pt x="5655" y="2368"/>
+                </a:cubicBezTo>
+                <a:cubicBezTo>
+                  <a:pt x="6454" y="3168"/>
+                  <a:pt x="6454" y="4463"/>
+                  <a:pt x="5655" y="5263"/>
+                </a:cubicBezTo>
+                <a:cubicBezTo>
+                  <a:pt x="4628" y="6290"/>
+                  <a:pt x="2963" y="6290"/>
+                  <a:pt x="1936" y="5263"/>
+                </a:cubicBezTo>
+                <a:cubicBezTo>
+                  <a:pt x="624" y="3951"/>
+                  <a:pt x="624" y="1825"/>
+                  <a:pt x="1936" y="514"/>
+                </a:cubicBezTo>
+                <a:cubicBezTo>
+                  <a:pt x="2047" y="403"/>
+                  <a:pt x="2047" y="222"/>
+                  <a:pt x="1936" y="111"/>
+                </a:cubicBezTo>
+                <a:cubicBezTo>
+                  <a:pt x="1825" y="0"/>
+                  <a:pt x="1644" y="0"/>
+                  <a:pt x="1533" y="111"/>
+                </a:cubicBezTo>
+                <a:cubicBezTo>
+                  <a:pt x="0" y="1645"/>
+                  <a:pt x="0" y="4132"/>
+                  <a:pt x="1533" y="5665"/>
+                </a:cubicBezTo>
+                <a:cubicBezTo>
+                  <a:pt x="2782" y="6914"/>
+                  <a:pt x="4808" y="6914"/>
+                  <a:pt x="6057" y="5665"/>
+                </a:cubicBezTo>
+                <a:cubicBezTo>
+                  <a:pt x="7078" y="4644"/>
+                  <a:pt x="7078" y="2988"/>
+                  <a:pt x="6057" y="1966"/>
+                </a:cubicBezTo>
+                <a:close/>
+              </a:path>
+            </a:pathLst>
+          </a:custGeom>
+          <a:solidFill>
+            <a:srgbClr val="FF0000"/>
+          </a:solidFill>
+          <a:ln>
+            <a:noFill/>
+          </a:ln>
+        </p:spPr>
+        <p:style>
+          <a:lnRef idx="2">
+            <a:schemeClr val="accent1">
+              <a:shade val="50000"/>
+            </a:schemeClr>
+          </a:lnRef>
+          <a:fillRef idx="1">
+            <a:schemeClr val="accent1"/>
+          </a:fillRef>
+          <a:effectRef idx="0">
+            <a:schemeClr val="accent1"/>
+          </a:effectRef>
+          <a:fontRef idx="minor">
+            <a:schemeClr val="lt1"/>
+          </a:fontRef>
+        </p:style>
+        <p:txBody>
+          <a:bodyPr rtlCol="0" anchor="ctr"/>
+          <a:lstStyle/>
+          <a:p>
+            <a:pPr algn="ctr"/>
+            <a:endParaRPr lang="en-US"/>
+          </a:p>
+        </p:txBody>
+      </p:sp>
+      <p:cxnSp>
+        <p:nvCxnSpPr>
+          <p:cNvPr id="109" name="直接连接符 108">
+            <a:extLst>
+              <a:ext uri="{FF2B5EF4-FFF2-40B4-BE49-F238E27FC236}">
+                <a16:creationId xmlns:a16="http://schemas.microsoft.com/office/drawing/2014/main" id="{4754F5F4-A84C-2F08-57E4-541D36426375}"/>
+              </a:ext>
+            </a:extLst>
+          </p:cNvPr>
+          <p:cNvCxnSpPr>
+            <a:cxnSpLocks/>
+          </p:cNvCxnSpPr>
+          <p:nvPr/>
+        </p:nvCxnSpPr>
+        <p:spPr>
+          <a:xfrm flipV="1">
+            <a:off x="7309321" y="3422929"/>
+            <a:ext cx="0" cy="1182409"/>
+          </a:xfrm>
+          <a:prstGeom prst="line">
+            <a:avLst/>
+          </a:prstGeom>
+          <a:ln>
+            <a:headEnd type="none"/>
+            <a:tailEnd type="oval"/>
+          </a:ln>
+        </p:spPr>
+        <p:style>
+          <a:lnRef idx="2">
+            <a:schemeClr val="dk1"/>
+          </a:lnRef>
+          <a:fillRef idx="0">
+            <a:schemeClr val="dk1"/>
+          </a:fillRef>
+          <a:effectRef idx="1">
+            <a:schemeClr val="dk1"/>
+          </a:effectRef>
+          <a:fontRef idx="minor">
+            <a:schemeClr val="tx1"/>
+          </a:fontRef>
+        </p:style>
+      </p:cxnSp>
+      <p:sp>
+        <p:nvSpPr>
+          <p:cNvPr id="110" name="椭圆 109">
+            <a:extLst>
+              <a:ext uri="{FF2B5EF4-FFF2-40B4-BE49-F238E27FC236}">
+                <a16:creationId xmlns:a16="http://schemas.microsoft.com/office/drawing/2014/main" id="{F085F098-5A19-AB53-440B-71156D163F9F}"/>
+              </a:ext>
+            </a:extLst>
+          </p:cNvPr>
+          <p:cNvSpPr/>
+          <p:nvPr/>
+        </p:nvSpPr>
+        <p:spPr>
+          <a:xfrm>
+            <a:off x="7195753" y="4502100"/>
+            <a:ext cx="216000" cy="216000"/>
+          </a:xfrm>
+          <a:prstGeom prst="ellipse">
+            <a:avLst/>
+          </a:prstGeom>
+          <a:solidFill>
+            <a:schemeClr val="bg1"/>
+          </a:solidFill>
+          <a:ln>
+            <a:solidFill>
+              <a:schemeClr val="tx1"/>
+            </a:solidFill>
+          </a:ln>
+        </p:spPr>
+        <p:style>
+          <a:lnRef idx="2">
+            <a:schemeClr val="accent1">
+              <a:shade val="15000"/>
+            </a:schemeClr>
+          </a:lnRef>
+          <a:fillRef idx="1">
+            <a:schemeClr val="accent1"/>
+          </a:fillRef>
+          <a:effectRef idx="0">
+            <a:schemeClr val="accent1"/>
+          </a:effectRef>
+          <a:fontRef idx="minor">
+            <a:schemeClr val="lt1"/>
+          </a:fontRef>
+        </p:style>
+        <p:txBody>
+          <a:bodyPr rtlCol="0" anchor="ctr"/>
+          <a:lstStyle/>
+          <a:p>
+            <a:pPr algn="ctr"/>
+            <a:endParaRPr lang="zh-CN" altLang="en-US"/>
+          </a:p>
+        </p:txBody>
+      </p:sp>
+      <p:cxnSp>
+        <p:nvCxnSpPr>
+          <p:cNvPr id="111" name="直接连接符 110">
+            <a:extLst>
+              <a:ext uri="{FF2B5EF4-FFF2-40B4-BE49-F238E27FC236}">
+                <a16:creationId xmlns:a16="http://schemas.microsoft.com/office/drawing/2014/main" id="{7740E907-5BBD-2198-31BE-DE1D777692B7}"/>
+              </a:ext>
+            </a:extLst>
+          </p:cNvPr>
+          <p:cNvCxnSpPr>
+            <a:cxnSpLocks/>
+          </p:cNvCxnSpPr>
+          <p:nvPr/>
+        </p:nvCxnSpPr>
+        <p:spPr>
+          <a:xfrm flipV="1">
+            <a:off x="10006728" y="3414713"/>
+            <a:ext cx="0" cy="1090613"/>
+          </a:xfrm>
+          <a:prstGeom prst="line">
+            <a:avLst/>
+          </a:prstGeom>
+          <a:ln>
+            <a:headEnd type="none"/>
+            <a:tailEnd type="oval"/>
+          </a:ln>
+        </p:spPr>
+        <p:style>
+          <a:lnRef idx="2">
+            <a:schemeClr val="dk1"/>
+          </a:lnRef>
+          <a:fillRef idx="0">
+            <a:schemeClr val="dk1"/>
+          </a:fillRef>
+          <a:effectRef idx="1">
+            <a:schemeClr val="dk1"/>
+          </a:effectRef>
+          <a:fontRef idx="minor">
+            <a:schemeClr val="tx1"/>
+          </a:fontRef>
+        </p:style>
+      </p:cxnSp>
+      <p:sp>
+        <p:nvSpPr>
+          <p:cNvPr id="112" name="椭圆 111">
+            <a:extLst>
+              <a:ext uri="{FF2B5EF4-FFF2-40B4-BE49-F238E27FC236}">
+                <a16:creationId xmlns:a16="http://schemas.microsoft.com/office/drawing/2014/main" id="{E5D0A49B-BED1-1AB6-9227-85A0417CC73C}"/>
+              </a:ext>
+            </a:extLst>
+          </p:cNvPr>
+          <p:cNvSpPr>
+            <a:spLocks noChangeAspect="1"/>
+          </p:cNvSpPr>
+          <p:nvPr/>
+        </p:nvSpPr>
+        <p:spPr>
+          <a:xfrm>
+            <a:off x="8658024" y="3394725"/>
+            <a:ext cx="76272" cy="78075"/>
+          </a:xfrm>
+          <a:prstGeom prst="ellipse">
+            <a:avLst/>
+          </a:prstGeom>
+          <a:solidFill>
+            <a:schemeClr val="tx1"/>
+          </a:solidFill>
+          <a:ln>
+            <a:noFill/>
+          </a:ln>
+        </p:spPr>
+        <p:style>
+          <a:lnRef idx="2">
+            <a:schemeClr val="accent1">
+              <a:shade val="15000"/>
+            </a:schemeClr>
+          </a:lnRef>
+          <a:fillRef idx="1">
+            <a:schemeClr val="accent1"/>
+          </a:fillRef>
+          <a:effectRef idx="0">
+            <a:schemeClr val="accent1"/>
+          </a:effectRef>
+          <a:fontRef idx="minor">
+            <a:schemeClr val="lt1"/>
+          </a:fontRef>
+        </p:style>
+        <p:txBody>
+          <a:bodyPr rtlCol="0" anchor="ctr"/>
+          <a:lstStyle/>
+          <a:p>
+            <a:pPr algn="ctr"/>
+            <a:endParaRPr lang="zh-CN" altLang="en-US"/>
+          </a:p>
+        </p:txBody>
+      </p:sp>
+      <p:sp>
+        <p:nvSpPr>
+          <p:cNvPr id="113" name="文本框 112">
+            <a:extLst>
+              <a:ext uri="{FF2B5EF4-FFF2-40B4-BE49-F238E27FC236}">
+                <a16:creationId xmlns:a16="http://schemas.microsoft.com/office/drawing/2014/main" id="{14943CBA-E1CF-879E-032A-F7622CA2A868}"/>
+              </a:ext>
+            </a:extLst>
+          </p:cNvPr>
+          <p:cNvSpPr txBox="1"/>
+          <p:nvPr/>
+        </p:nvSpPr>
+        <p:spPr>
+          <a:xfrm>
+            <a:off x="8172144" y="3480396"/>
+            <a:ext cx="1085582" cy="307777"/>
+          </a:xfrm>
+          <a:prstGeom prst="rect">
+            <a:avLst/>
+          </a:prstGeom>
+          <a:noFill/>
+        </p:spPr>
+        <p:txBody>
+          <a:bodyPr wrap="square" rtlCol="0">
+            <a:spAutoFit/>
+          </a:bodyPr>
+          <a:lstStyle/>
+          <a:p>
+            <a:pPr algn="ctr"/>
+            <a:r>
+              <a:rPr lang="en-US" altLang="zh-CN" sz="1400" dirty="0">
+                <a:latin typeface="Times New Roman" panose="02020603050405020304" pitchFamily="18" charset="0"/>
+                <a:cs typeface="Times New Roman" panose="02020603050405020304" pitchFamily="18" charset="0"/>
+              </a:rPr>
+              <a:t>11</a:t>
+            </a:r>
+            <a:r>
+              <a:rPr lang="en-US" altLang="zh-CN" sz="1400" dirty="0">
+                <a:solidFill>
+                  <a:srgbClr val="FF0000"/>
+                </a:solidFill>
+                <a:latin typeface="Times New Roman" panose="02020603050405020304" pitchFamily="18" charset="0"/>
+                <a:cs typeface="Times New Roman" panose="02020603050405020304" pitchFamily="18" charset="0"/>
+              </a:rPr>
+              <a:t>FFAA</a:t>
+            </a:r>
+            <a:r>
+              <a:rPr lang="en-US" altLang="zh-CN" sz="1400" dirty="0">
+                <a:latin typeface="Times New Roman" panose="02020603050405020304" pitchFamily="18" charset="0"/>
+                <a:cs typeface="Times New Roman" panose="02020603050405020304" pitchFamily="18" charset="0"/>
+              </a:rPr>
+              <a:t>00</a:t>
+            </a:r>
+            <a:endParaRPr lang="zh-CN" altLang="en-US" sz="1400" dirty="0">
+              <a:latin typeface="Times New Roman" panose="02020603050405020304" pitchFamily="18" charset="0"/>
+              <a:cs typeface="Times New Roman" panose="02020603050405020304" pitchFamily="18" charset="0"/>
+            </a:endParaRPr>
+          </a:p>
+        </p:txBody>
+      </p:sp>
+    </p:spTree>
+    <p:extLst>
+      <p:ext uri="{BB962C8B-B14F-4D97-AF65-F5344CB8AC3E}">
+        <p14:creationId xmlns:p14="http://schemas.microsoft.com/office/powerpoint/2010/main" val="616518152"/>
       </p:ext>
     </p:extLst>
   </p:cSld>
